--- a/docs/presentations/pointnet2_attnv2_light_theme.pptx
+++ b/docs/presentations/pointnet2_attnv2_light_theme.pptx
@@ -5,24 +5,24 @@
     <p:sldMasterId id="2147483648" r:id="rId1"/>
   </p:sldMasterIdLst>
   <p:sldIdLst>
-    <p:sldId id="256" r:id="rId7"/>
-    <p:sldId id="257" r:id="rId8"/>
-    <p:sldId id="258" r:id="rId9"/>
-    <p:sldId id="259" r:id="rId10"/>
-    <p:sldId id="260" r:id="rId11"/>
-    <p:sldId id="261" r:id="rId12"/>
-    <p:sldId id="262" r:id="rId13"/>
-    <p:sldId id="263" r:id="rId14"/>
-    <p:sldId id="264" r:id="rId15"/>
-    <p:sldId id="265" r:id="rId16"/>
-    <p:sldId id="266" r:id="rId17"/>
-    <p:sldId id="267" r:id="rId18"/>
-    <p:sldId id="268" r:id="rId19"/>
-    <p:sldId id="269" r:id="rId20"/>
-    <p:sldId id="270" r:id="rId21"/>
-    <p:sldId id="271" r:id="rId22"/>
+    <p:sldId id="256" r:id="rId2"/>
+    <p:sldId id="257" r:id="rId3"/>
+    <p:sldId id="258" r:id="rId4"/>
+    <p:sldId id="259" r:id="rId5"/>
+    <p:sldId id="260" r:id="rId6"/>
+    <p:sldId id="261" r:id="rId7"/>
+    <p:sldId id="262" r:id="rId8"/>
+    <p:sldId id="263" r:id="rId9"/>
+    <p:sldId id="264" r:id="rId10"/>
+    <p:sldId id="265" r:id="rId11"/>
+    <p:sldId id="266" r:id="rId12"/>
+    <p:sldId id="267" r:id="rId13"/>
+    <p:sldId id="268" r:id="rId14"/>
+    <p:sldId id="269" r:id="rId15"/>
+    <p:sldId id="270" r:id="rId16"/>
+    <p:sldId id="271" r:id="rId17"/>
   </p:sldIdLst>
-  <p:sldSz cx="12191695" cy="6858000" type="screen4x3"/>
+  <p:sldSz cx="12192000" cy="6858000"/>
   <p:notesSz cx="6858000" cy="9144000"/>
   <p:defaultTextStyle>
     <a:defPPr>
@@ -119,22 +119,42 @@
       </a:defRPr>
     </a:lvl9pPr>
   </p:defaultTextStyle>
+  <p:extLst>
+    <p:ext uri="{EFAFB233-063F-42B5-8137-9DF3F51BA10A}">
+      <p15:sldGuideLst xmlns:p15="http://schemas.microsoft.com/office/powerpoint/2012/main">
+        <p15:guide id="1" orient="horz" pos="2160">
+          <p15:clr>
+            <a:srgbClr val="A4A3A4"/>
+          </p15:clr>
+        </p15:guide>
+        <p15:guide id="2" pos="2880">
+          <p15:clr>
+            <a:srgbClr val="A4A3A4"/>
+          </p15:clr>
+        </p15:guide>
+      </p15:sldGuideLst>
+    </p:ext>
+  </p:extLst>
 </p:presentation>
 </file>
 
 <file path=ppt/charts/chart1.xml><?xml version="1.0" encoding="utf-8"?>
-<c:chartSpace xmlns:c="http://schemas.openxmlformats.org/drawingml/2006/chart" xmlns:a="http://schemas.openxmlformats.org/drawingml/2006/main" xmlns:r="http://schemas.openxmlformats.org/officeDocument/2006/relationships">
+<c:chartSpace xmlns:c="http://schemas.openxmlformats.org/drawingml/2006/chart" xmlns:a="http://schemas.openxmlformats.org/drawingml/2006/main" xmlns:r="http://schemas.openxmlformats.org/officeDocument/2006/relationships" xmlns:c16r2="http://schemas.microsoft.com/office/drawing/2015/06/chart">
   <c:date1904 val="0"/>
+  <c:lang val="en-US"/>
+  <c:roundedCorners val="1"/>
+  <c:style val="2"/>
   <c:chart>
     <c:title>
-      <c:layout/>
       <c:overlay val="0"/>
     </c:title>
     <c:autoTitleDeleted val="0"/>
     <c:plotArea>
+      <c:layout/>
       <c:barChart>
         <c:barDir val="col"/>
         <c:grouping val="clustered"/>
+        <c:varyColors val="1"/>
         <c:ser>
           <c:idx val="0"/>
           <c:order val="0"/>
@@ -154,6 +174,7 @@
               <a:srgbClr val="0078D4"/>
             </a:solidFill>
           </c:spPr>
+          <c:invertIfNegative val="1"/>
           <c:cat>
             <c:strRef>
               <c:f>Sheet1!$A$2:$A$5</c:f>
@@ -181,20 +202,34 @@
                 <c:formatCode>General</c:formatCode>
                 <c:ptCount val="4"/>
                 <c:pt idx="0">
-                  <c:v>92.459</c:v>
+                  <c:v>92.459000000000003</c:v>
                 </c:pt>
                 <c:pt idx="1">
-                  <c:v>91.976</c:v>
+                  <c:v>91.975999999999999</c:v>
                 </c:pt>
                 <c:pt idx="2">
-                  <c:v>91.392</c:v>
+                  <c:v>91.391999999999996</c:v>
                 </c:pt>
                 <c:pt idx="3">
-                  <c:v>92.056</c:v>
+                  <c:v>92.055999999999997</c:v>
                 </c:pt>
               </c:numCache>
             </c:numRef>
           </c:val>
+          <c:extLst>
+            <c:ext xmlns:c14="http://schemas.microsoft.com/office/drawing/2007/8/2/chart" uri="{6F2FDCE9-48DA-4B69-8628-5D25D57E5C99}">
+              <c14:invertSolidFillFmt>
+                <c14:spPr xmlns:c14="http://schemas.microsoft.com/office/drawing/2007/8/2/chart">
+                  <a:solidFill>
+                    <a:srgbClr val="FFFFFF"/>
+                  </a:solidFill>
+                </c14:spPr>
+              </c14:invertSolidFillFmt>
+            </c:ext>
+            <c:ext xmlns:c16="http://schemas.microsoft.com/office/drawing/2014/chart" uri="{C3380CC4-5D6E-409C-BE32-E72D297353CC}">
+              <c16:uniqueId val="{00000000-6744-664F-BFBA-E7653A3F58D0}"/>
+            </c:ext>
+          </c:extLst>
         </c:ser>
         <c:ser>
           <c:idx val="1"/>
@@ -215,6 +250,7 @@
               <a:srgbClr val="5197FF"/>
             </a:solidFill>
           </c:spPr>
+          <c:invertIfNegative val="1"/>
           <c:cat>
             <c:strRef>
               <c:f>Sheet1!$A$2:$A$5</c:f>
@@ -242,21 +278,44 @@
                 <c:formatCode>General</c:formatCode>
                 <c:ptCount val="4"/>
                 <c:pt idx="0">
-                  <c:v>89.175</c:v>
+                  <c:v>89.174999999999997</c:v>
                 </c:pt>
                 <c:pt idx="1">
-                  <c:v>89.626</c:v>
+                  <c:v>89.626000000000005</c:v>
                 </c:pt>
                 <c:pt idx="2">
-                  <c:v>86.231</c:v>
+                  <c:v>86.230999999999995</c:v>
                 </c:pt>
                 <c:pt idx="3">
-                  <c:v>89.597</c:v>
+                  <c:v>89.596999999999994</c:v>
                 </c:pt>
               </c:numCache>
             </c:numRef>
           </c:val>
+          <c:extLst>
+            <c:ext xmlns:c14="http://schemas.microsoft.com/office/drawing/2007/8/2/chart" uri="{6F2FDCE9-48DA-4B69-8628-5D25D57E5C99}">
+              <c14:invertSolidFillFmt>
+                <c14:spPr xmlns:c14="http://schemas.microsoft.com/office/drawing/2007/8/2/chart">
+                  <a:solidFill>
+                    <a:srgbClr val="FFFFFF"/>
+                  </a:solidFill>
+                </c14:spPr>
+              </c14:invertSolidFillFmt>
+            </c:ext>
+            <c:ext xmlns:c16="http://schemas.microsoft.com/office/drawing/2014/chart" uri="{C3380CC4-5D6E-409C-BE32-E72D297353CC}">
+              <c16:uniqueId val="{00000001-6744-664F-BFBA-E7653A3F58D0}"/>
+            </c:ext>
+          </c:extLst>
         </c:ser>
+        <c:dLbls>
+          <c:showLegendKey val="0"/>
+          <c:showVal val="0"/>
+          <c:showCatName val="0"/>
+          <c:showSerName val="0"/>
+          <c:showPercent val="0"/>
+          <c:showBubbleSize val="0"/>
+        </c:dLbls>
+        <c:gapWidth val="150"/>
         <c:axId val="-2068027336"/>
         <c:axId val="-2113994440"/>
       </c:barChart>
@@ -267,6 +326,7 @@
         </c:scaling>
         <c:delete val="0"/>
         <c:axPos val="b"/>
+        <c:numFmt formatCode="General" sourceLinked="0"/>
         <c:majorTickMark val="out"/>
         <c:minorTickMark val="none"/>
         <c:tickLblPos val="nextTo"/>
@@ -277,6 +337,7 @@
             <a:pPr>
               <a:defRPr sz="1000"/>
             </a:pPr>
+            <a:endParaRPr lang="en-US"/>
           </a:p>
         </c:txPr>
         <c:crossAx val="-2113994440"/>
@@ -289,12 +350,14 @@
       <c:valAx>
         <c:axId val="-2113994440"/>
         <c:scaling>
-          <c:max val="100.0"/>
-          <c:min val="80.0"/>
+          <c:orientation val="minMax"/>
+          <c:max val="100"/>
+          <c:min val="80"/>
         </c:scaling>
         <c:delete val="0"/>
         <c:axPos val="l"/>
         <c:majorGridlines/>
+        <c:numFmt formatCode="General" sourceLinked="1"/>
         <c:majorTickMark val="out"/>
         <c:minorTickMark val="none"/>
         <c:tickLblPos val="nextTo"/>
@@ -305,17 +368,21 @@
             <a:pPr>
               <a:defRPr sz="1000"/>
             </a:pPr>
+            <a:endParaRPr lang="en-US"/>
           </a:p>
         </c:txPr>
         <c:crossAx val="-2068027336"/>
         <c:crosses val="autoZero"/>
+        <c:crossBetween val="between"/>
       </c:valAx>
     </c:plotArea>
     <c:legend>
       <c:legendPos val="b"/>
       <c:overlay val="0"/>
     </c:legend>
+    <c:plotVisOnly val="1"/>
     <c:dispBlanksAs val="gap"/>
+    <c:showDLblsOverMax val="1"/>
   </c:chart>
   <c:txPr>
     <a:bodyPr/>
@@ -334,11 +401,15 @@
 </file>
 
 <file path=ppt/charts/chart2.xml><?xml version="1.0" encoding="utf-8"?>
-<c:chartSpace xmlns:c="http://schemas.openxmlformats.org/drawingml/2006/chart" xmlns:a="http://schemas.openxmlformats.org/drawingml/2006/main" xmlns:r="http://schemas.openxmlformats.org/officeDocument/2006/relationships">
+<c:chartSpace xmlns:c="http://schemas.openxmlformats.org/drawingml/2006/chart" xmlns:a="http://schemas.openxmlformats.org/drawingml/2006/main" xmlns:r="http://schemas.openxmlformats.org/officeDocument/2006/relationships" xmlns:c16r2="http://schemas.microsoft.com/office/drawing/2015/06/chart">
   <c:date1904 val="0"/>
+  <c:lang val="en-US"/>
+  <c:roundedCorners val="1"/>
+  <c:style val="2"/>
   <c:chart>
     <c:autoTitleDeleted val="0"/>
     <c:plotArea>
+      <c:layout/>
       <c:lineChart>
         <c:grouping val="standard"/>
         <c:varyColors val="0"/>
@@ -402,33 +473,38 @@
                 <c:formatCode>General</c:formatCode>
                 <c:ptCount val="8"/>
                 <c:pt idx="0">
-                  <c:v>71.726</c:v>
+                  <c:v>71.725999999999999</c:v>
                 </c:pt>
                 <c:pt idx="1">
-                  <c:v>87.599</c:v>
+                  <c:v>87.599000000000004</c:v>
                 </c:pt>
                 <c:pt idx="2">
                   <c:v>83.631</c:v>
                 </c:pt>
                 <c:pt idx="3">
-                  <c:v>94.246</c:v>
+                  <c:v>94.245999999999995</c:v>
                 </c:pt>
                 <c:pt idx="4">
-                  <c:v>96.627</c:v>
+                  <c:v>96.626999999999995</c:v>
                 </c:pt>
                 <c:pt idx="5">
-                  <c:v>98.611</c:v>
+                  <c:v>98.611000000000004</c:v>
                 </c:pt>
                 <c:pt idx="6">
-                  <c:v>98.016</c:v>
+                  <c:v>98.016000000000005</c:v>
                 </c:pt>
                 <c:pt idx="7">
-                  <c:v>98.611</c:v>
+                  <c:v>98.611000000000004</c:v>
                 </c:pt>
               </c:numCache>
             </c:numRef>
           </c:val>
           <c:smooth val="0"/>
+          <c:extLst>
+            <c:ext xmlns:c16="http://schemas.microsoft.com/office/drawing/2014/chart" uri="{C3380CC4-5D6E-409C-BE32-E72D297353CC}">
+              <c16:uniqueId val="{00000000-046C-D54B-B5C8-A16BD28DACA4}"/>
+            </c:ext>
+          </c:extLst>
         </c:ser>
         <c:ser>
           <c:idx val="1"/>
@@ -490,25 +566,25 @@
                 <c:formatCode>General</c:formatCode>
                 <c:ptCount val="8"/>
                 <c:pt idx="0">
-                  <c:v>37.798</c:v>
+                  <c:v>37.798000000000002</c:v>
                 </c:pt>
                 <c:pt idx="1">
-                  <c:v>89.683</c:v>
+                  <c:v>89.683000000000007</c:v>
                 </c:pt>
                 <c:pt idx="2">
-                  <c:v>89.583</c:v>
+                  <c:v>89.582999999999998</c:v>
                 </c:pt>
                 <c:pt idx="3">
-                  <c:v>95.139</c:v>
+                  <c:v>95.138999999999996</c:v>
                 </c:pt>
                 <c:pt idx="4">
-                  <c:v>97.718</c:v>
+                  <c:v>97.718000000000004</c:v>
                 </c:pt>
                 <c:pt idx="5">
-                  <c:v>98.313</c:v>
+                  <c:v>98.313000000000002</c:v>
                 </c:pt>
                 <c:pt idx="6">
-                  <c:v>98.115</c:v>
+                  <c:v>98.114999999999995</c:v>
                 </c:pt>
                 <c:pt idx="7">
                   <c:v>98.512</c:v>
@@ -517,7 +593,20 @@
             </c:numRef>
           </c:val>
           <c:smooth val="0"/>
+          <c:extLst>
+            <c:ext xmlns:c16="http://schemas.microsoft.com/office/drawing/2014/chart" uri="{C3380CC4-5D6E-409C-BE32-E72D297353CC}">
+              <c16:uniqueId val="{00000001-046C-D54B-B5C8-A16BD28DACA4}"/>
+            </c:ext>
+          </c:extLst>
         </c:ser>
+        <c:dLbls>
+          <c:showLegendKey val="0"/>
+          <c:showVal val="0"/>
+          <c:showCatName val="0"/>
+          <c:showSerName val="0"/>
+          <c:showPercent val="0"/>
+          <c:showBubbleSize val="0"/>
+        </c:dLbls>
         <c:marker val="1"/>
         <c:smooth val="0"/>
         <c:axId val="2118791784"/>
@@ -530,6 +619,7 @@
         </c:scaling>
         <c:delete val="0"/>
         <c:axPos val="b"/>
+        <c:numFmt formatCode="General" sourceLinked="0"/>
         <c:majorTickMark val="out"/>
         <c:minorTickMark val="none"/>
         <c:tickLblPos val="nextTo"/>
@@ -540,6 +630,7 @@
             <a:pPr>
               <a:defRPr sz="1000"/>
             </a:pPr>
+            <a:endParaRPr lang="en-US"/>
           </a:p>
         </c:txPr>
         <c:crossAx val="2140495176"/>
@@ -552,12 +643,14 @@
       <c:valAx>
         <c:axId val="2140495176"/>
         <c:scaling>
-          <c:max val="100.0"/>
-          <c:min val="30.0"/>
+          <c:orientation val="minMax"/>
+          <c:max val="100"/>
+          <c:min val="30"/>
         </c:scaling>
         <c:delete val="0"/>
         <c:axPos val="l"/>
         <c:majorGridlines/>
+        <c:numFmt formatCode="General" sourceLinked="1"/>
         <c:majorTickMark val="out"/>
         <c:minorTickMark val="none"/>
         <c:tickLblPos val="nextTo"/>
@@ -568,15 +661,16 @@
             <a:pPr>
               <a:defRPr sz="1000"/>
             </a:pPr>
+            <a:endParaRPr lang="en-US"/>
           </a:p>
         </c:txPr>
         <c:crossAx val="2118791784"/>
         <c:crosses val="autoZero"/>
+        <c:crossBetween val="between"/>
       </c:valAx>
     </c:plotArea>
     <c:legend>
       <c:legendPos val="b"/>
-      <c:layout/>
       <c:overlay val="0"/>
     </c:legend>
     <c:plotVisOnly val="1"/>
@@ -637,10 +731,9 @@
           <a:lstStyle/>
           <a:p>
             <a:r>
-              <a:rPr lang="en-US" smtClean="0"/>
+              <a:rPr lang="en-US"/>
               <a:t>Click to edit Master title style</a:t>
             </a:r>
-            <a:endParaRPr lang="en-US"/>
           </a:p>
         </p:txBody>
       </p:sp>
@@ -756,10 +849,9 @@
           </a:lstStyle>
           <a:p>
             <a:r>
-              <a:rPr lang="en-US" smtClean="0"/>
+              <a:rPr lang="en-US"/>
               <a:t>Click to edit Master subtitle style</a:t>
             </a:r>
-            <a:endParaRPr lang="en-US"/>
           </a:p>
         </p:txBody>
       </p:sp>
@@ -780,7 +872,7 @@
           <a:p>
             <a:fld id="{5BCAD085-E8A6-8845-BD4E-CB4CCA059FC4}" type="datetimeFigureOut">
               <a:rPr lang="en-US" smtClean="0"/>
-              <a:t>1/27/13</a:t>
+              <a:t>4/14/26</a:t>
             </a:fld>
             <a:endParaRPr lang="en-US"/>
           </a:p>
@@ -874,10 +966,9 @@
           <a:lstStyle/>
           <a:p>
             <a:r>
-              <a:rPr lang="en-US" smtClean="0"/>
+              <a:rPr lang="en-US"/>
               <a:t>Click to edit Master title style</a:t>
             </a:r>
-            <a:endParaRPr lang="en-US"/>
           </a:p>
         </p:txBody>
       </p:sp>
@@ -898,38 +989,37 @@
           <a:p>
             <a:pPr lvl="0"/>
             <a:r>
-              <a:rPr lang="en-US" smtClean="0"/>
+              <a:rPr lang="en-US"/>
               <a:t>Click to edit Master text styles</a:t>
             </a:r>
           </a:p>
           <a:p>
             <a:pPr lvl="1"/>
             <a:r>
-              <a:rPr lang="en-US" smtClean="0"/>
+              <a:rPr lang="en-US"/>
               <a:t>Second level</a:t>
             </a:r>
           </a:p>
           <a:p>
             <a:pPr lvl="2"/>
             <a:r>
-              <a:rPr lang="en-US" smtClean="0"/>
+              <a:rPr lang="en-US"/>
               <a:t>Third level</a:t>
             </a:r>
           </a:p>
           <a:p>
             <a:pPr lvl="3"/>
             <a:r>
-              <a:rPr lang="en-US" smtClean="0"/>
+              <a:rPr lang="en-US"/>
               <a:t>Fourth level</a:t>
             </a:r>
           </a:p>
           <a:p>
             <a:pPr lvl="4"/>
             <a:r>
-              <a:rPr lang="en-US" smtClean="0"/>
+              <a:rPr lang="en-US"/>
               <a:t>Fifth level</a:t>
             </a:r>
-            <a:endParaRPr lang="en-US"/>
           </a:p>
         </p:txBody>
       </p:sp>
@@ -950,7 +1040,7 @@
           <a:p>
             <a:fld id="{5BCAD085-E8A6-8845-BD4E-CB4CCA059FC4}" type="datetimeFigureOut">
               <a:rPr lang="en-US" smtClean="0"/>
-              <a:t>1/27/13</a:t>
+              <a:t>4/14/26</a:t>
             </a:fld>
             <a:endParaRPr lang="en-US"/>
           </a:p>
@@ -1049,10 +1139,9 @@
           <a:lstStyle/>
           <a:p>
             <a:r>
-              <a:rPr lang="en-US" smtClean="0"/>
+              <a:rPr lang="en-US"/>
               <a:t>Click to edit Master title style</a:t>
             </a:r>
-            <a:endParaRPr lang="en-US"/>
           </a:p>
         </p:txBody>
       </p:sp>
@@ -1078,38 +1167,37 @@
           <a:p>
             <a:pPr lvl="0"/>
             <a:r>
-              <a:rPr lang="en-US" smtClean="0"/>
+              <a:rPr lang="en-US"/>
               <a:t>Click to edit Master text styles</a:t>
             </a:r>
           </a:p>
           <a:p>
             <a:pPr lvl="1"/>
             <a:r>
-              <a:rPr lang="en-US" smtClean="0"/>
+              <a:rPr lang="en-US"/>
               <a:t>Second level</a:t>
             </a:r>
           </a:p>
           <a:p>
             <a:pPr lvl="2"/>
             <a:r>
-              <a:rPr lang="en-US" smtClean="0"/>
+              <a:rPr lang="en-US"/>
               <a:t>Third level</a:t>
             </a:r>
           </a:p>
           <a:p>
             <a:pPr lvl="3"/>
             <a:r>
-              <a:rPr lang="en-US" smtClean="0"/>
+              <a:rPr lang="en-US"/>
               <a:t>Fourth level</a:t>
             </a:r>
           </a:p>
           <a:p>
             <a:pPr lvl="4"/>
             <a:r>
-              <a:rPr lang="en-US" smtClean="0"/>
+              <a:rPr lang="en-US"/>
               <a:t>Fifth level</a:t>
             </a:r>
-            <a:endParaRPr lang="en-US"/>
           </a:p>
         </p:txBody>
       </p:sp>
@@ -1130,7 +1218,7 @@
           <a:p>
             <a:fld id="{5BCAD085-E8A6-8845-BD4E-CB4CCA059FC4}" type="datetimeFigureOut">
               <a:rPr lang="en-US" smtClean="0"/>
-              <a:t>1/27/13</a:t>
+              <a:t>4/14/26</a:t>
             </a:fld>
             <a:endParaRPr lang="en-US"/>
           </a:p>
@@ -1224,10 +1312,9 @@
           <a:lstStyle/>
           <a:p>
             <a:r>
-              <a:rPr lang="en-US" smtClean="0"/>
+              <a:rPr lang="en-US"/>
               <a:t>Click to edit Master title style</a:t>
             </a:r>
-            <a:endParaRPr lang="en-US"/>
           </a:p>
         </p:txBody>
       </p:sp>
@@ -1248,38 +1335,37 @@
           <a:p>
             <a:pPr lvl="0"/>
             <a:r>
-              <a:rPr lang="en-US" smtClean="0"/>
+              <a:rPr lang="en-US"/>
               <a:t>Click to edit Master text styles</a:t>
             </a:r>
           </a:p>
           <a:p>
             <a:pPr lvl="1"/>
             <a:r>
-              <a:rPr lang="en-US" smtClean="0"/>
+              <a:rPr lang="en-US"/>
               <a:t>Second level</a:t>
             </a:r>
           </a:p>
           <a:p>
             <a:pPr lvl="2"/>
             <a:r>
-              <a:rPr lang="en-US" smtClean="0"/>
+              <a:rPr lang="en-US"/>
               <a:t>Third level</a:t>
             </a:r>
           </a:p>
           <a:p>
             <a:pPr lvl="3"/>
             <a:r>
-              <a:rPr lang="en-US" smtClean="0"/>
+              <a:rPr lang="en-US"/>
               <a:t>Fourth level</a:t>
             </a:r>
           </a:p>
           <a:p>
             <a:pPr lvl="4"/>
             <a:r>
-              <a:rPr lang="en-US" smtClean="0"/>
+              <a:rPr lang="en-US"/>
               <a:t>Fifth level</a:t>
             </a:r>
-            <a:endParaRPr lang="en-US"/>
           </a:p>
         </p:txBody>
       </p:sp>
@@ -1300,7 +1386,7 @@
           <a:p>
             <a:fld id="{5BCAD085-E8A6-8845-BD4E-CB4CCA059FC4}" type="datetimeFigureOut">
               <a:rPr lang="en-US" smtClean="0"/>
-              <a:t>1/27/13</a:t>
+              <a:t>4/14/26</a:t>
             </a:fld>
             <a:endParaRPr lang="en-US"/>
           </a:p>
@@ -1403,10 +1489,9 @@
           </a:lstStyle>
           <a:p>
             <a:r>
-              <a:rPr lang="en-US" smtClean="0"/>
+              <a:rPr lang="en-US"/>
               <a:t>Click to edit Master title style</a:t>
             </a:r>
-            <a:endParaRPr lang="en-US"/>
           </a:p>
         </p:txBody>
       </p:sp>
@@ -1523,7 +1608,7 @@
           <a:p>
             <a:pPr lvl="0"/>
             <a:r>
-              <a:rPr lang="en-US" smtClean="0"/>
+              <a:rPr lang="en-US"/>
               <a:t>Click to edit Master text styles</a:t>
             </a:r>
           </a:p>
@@ -1546,7 +1631,7 @@
           <a:p>
             <a:fld id="{5BCAD085-E8A6-8845-BD4E-CB4CCA059FC4}" type="datetimeFigureOut">
               <a:rPr lang="en-US" smtClean="0"/>
-              <a:t>1/27/13</a:t>
+              <a:t>4/14/26</a:t>
             </a:fld>
             <a:endParaRPr lang="en-US"/>
           </a:p>
@@ -1640,10 +1725,9 @@
           <a:lstStyle/>
           <a:p>
             <a:r>
-              <a:rPr lang="en-US" smtClean="0"/>
+              <a:rPr lang="en-US"/>
               <a:t>Click to edit Master title style</a:t>
             </a:r>
-            <a:endParaRPr lang="en-US"/>
           </a:p>
         </p:txBody>
       </p:sp>
@@ -1697,38 +1781,37 @@
           <a:p>
             <a:pPr lvl="0"/>
             <a:r>
-              <a:rPr lang="en-US" smtClean="0"/>
+              <a:rPr lang="en-US"/>
               <a:t>Click to edit Master text styles</a:t>
             </a:r>
           </a:p>
           <a:p>
             <a:pPr lvl="1"/>
             <a:r>
-              <a:rPr lang="en-US" smtClean="0"/>
+              <a:rPr lang="en-US"/>
               <a:t>Second level</a:t>
             </a:r>
           </a:p>
           <a:p>
             <a:pPr lvl="2"/>
             <a:r>
-              <a:rPr lang="en-US" smtClean="0"/>
+              <a:rPr lang="en-US"/>
               <a:t>Third level</a:t>
             </a:r>
           </a:p>
           <a:p>
             <a:pPr lvl="3"/>
             <a:r>
-              <a:rPr lang="en-US" smtClean="0"/>
+              <a:rPr lang="en-US"/>
               <a:t>Fourth level</a:t>
             </a:r>
           </a:p>
           <a:p>
             <a:pPr lvl="4"/>
             <a:r>
-              <a:rPr lang="en-US" smtClean="0"/>
+              <a:rPr lang="en-US"/>
               <a:t>Fifth level</a:t>
             </a:r>
-            <a:endParaRPr lang="en-US"/>
           </a:p>
         </p:txBody>
       </p:sp>
@@ -1782,38 +1865,37 @@
           <a:p>
             <a:pPr lvl="0"/>
             <a:r>
-              <a:rPr lang="en-US" smtClean="0"/>
+              <a:rPr lang="en-US"/>
               <a:t>Click to edit Master text styles</a:t>
             </a:r>
           </a:p>
           <a:p>
             <a:pPr lvl="1"/>
             <a:r>
-              <a:rPr lang="en-US" smtClean="0"/>
+              <a:rPr lang="en-US"/>
               <a:t>Second level</a:t>
             </a:r>
           </a:p>
           <a:p>
             <a:pPr lvl="2"/>
             <a:r>
-              <a:rPr lang="en-US" smtClean="0"/>
+              <a:rPr lang="en-US"/>
               <a:t>Third level</a:t>
             </a:r>
           </a:p>
           <a:p>
             <a:pPr lvl="3"/>
             <a:r>
-              <a:rPr lang="en-US" smtClean="0"/>
+              <a:rPr lang="en-US"/>
               <a:t>Fourth level</a:t>
             </a:r>
           </a:p>
           <a:p>
             <a:pPr lvl="4"/>
             <a:r>
-              <a:rPr lang="en-US" smtClean="0"/>
+              <a:rPr lang="en-US"/>
               <a:t>Fifth level</a:t>
             </a:r>
-            <a:endParaRPr lang="en-US"/>
           </a:p>
         </p:txBody>
       </p:sp>
@@ -1834,7 +1916,7 @@
           <a:p>
             <a:fld id="{5BCAD085-E8A6-8845-BD4E-CB4CCA059FC4}" type="datetimeFigureOut">
               <a:rPr lang="en-US" smtClean="0"/>
-              <a:t>1/27/13</a:t>
+              <a:t>4/14/26</a:t>
             </a:fld>
             <a:endParaRPr lang="en-US"/>
           </a:p>
@@ -1932,10 +2014,9 @@
           </a:lstStyle>
           <a:p>
             <a:r>
-              <a:rPr lang="en-US" smtClean="0"/>
+              <a:rPr lang="en-US"/>
               <a:t>Click to edit Master title style</a:t>
             </a:r>
-            <a:endParaRPr lang="en-US"/>
           </a:p>
         </p:txBody>
       </p:sp>
@@ -1998,7 +2079,7 @@
           <a:p>
             <a:pPr lvl="0"/>
             <a:r>
-              <a:rPr lang="en-US" smtClean="0"/>
+              <a:rPr lang="en-US"/>
               <a:t>Click to edit Master text styles</a:t>
             </a:r>
           </a:p>
@@ -2054,38 +2135,37 @@
           <a:p>
             <a:pPr lvl="0"/>
             <a:r>
-              <a:rPr lang="en-US" smtClean="0"/>
+              <a:rPr lang="en-US"/>
               <a:t>Click to edit Master text styles</a:t>
             </a:r>
           </a:p>
           <a:p>
             <a:pPr lvl="1"/>
             <a:r>
-              <a:rPr lang="en-US" smtClean="0"/>
+              <a:rPr lang="en-US"/>
               <a:t>Second level</a:t>
             </a:r>
           </a:p>
           <a:p>
             <a:pPr lvl="2"/>
             <a:r>
-              <a:rPr lang="en-US" smtClean="0"/>
+              <a:rPr lang="en-US"/>
               <a:t>Third level</a:t>
             </a:r>
           </a:p>
           <a:p>
             <a:pPr lvl="3"/>
             <a:r>
-              <a:rPr lang="en-US" smtClean="0"/>
+              <a:rPr lang="en-US"/>
               <a:t>Fourth level</a:t>
             </a:r>
           </a:p>
           <a:p>
             <a:pPr lvl="4"/>
             <a:r>
-              <a:rPr lang="en-US" smtClean="0"/>
+              <a:rPr lang="en-US"/>
               <a:t>Fifth level</a:t>
             </a:r>
-            <a:endParaRPr lang="en-US"/>
           </a:p>
         </p:txBody>
       </p:sp>
@@ -2148,7 +2228,7 @@
           <a:p>
             <a:pPr lvl="0"/>
             <a:r>
-              <a:rPr lang="en-US" smtClean="0"/>
+              <a:rPr lang="en-US"/>
               <a:t>Click to edit Master text styles</a:t>
             </a:r>
           </a:p>
@@ -2204,38 +2284,37 @@
           <a:p>
             <a:pPr lvl="0"/>
             <a:r>
-              <a:rPr lang="en-US" smtClean="0"/>
+              <a:rPr lang="en-US"/>
               <a:t>Click to edit Master text styles</a:t>
             </a:r>
           </a:p>
           <a:p>
             <a:pPr lvl="1"/>
             <a:r>
-              <a:rPr lang="en-US" smtClean="0"/>
+              <a:rPr lang="en-US"/>
               <a:t>Second level</a:t>
             </a:r>
           </a:p>
           <a:p>
             <a:pPr lvl="2"/>
             <a:r>
-              <a:rPr lang="en-US" smtClean="0"/>
+              <a:rPr lang="en-US"/>
               <a:t>Third level</a:t>
             </a:r>
           </a:p>
           <a:p>
             <a:pPr lvl="3"/>
             <a:r>
-              <a:rPr lang="en-US" smtClean="0"/>
+              <a:rPr lang="en-US"/>
               <a:t>Fourth level</a:t>
             </a:r>
           </a:p>
           <a:p>
             <a:pPr lvl="4"/>
             <a:r>
-              <a:rPr lang="en-US" smtClean="0"/>
+              <a:rPr lang="en-US"/>
               <a:t>Fifth level</a:t>
             </a:r>
-            <a:endParaRPr lang="en-US"/>
           </a:p>
         </p:txBody>
       </p:sp>
@@ -2256,7 +2335,7 @@
           <a:p>
             <a:fld id="{5BCAD085-E8A6-8845-BD4E-CB4CCA059FC4}" type="datetimeFigureOut">
               <a:rPr lang="en-US" smtClean="0"/>
-              <a:t>1/27/13</a:t>
+              <a:t>4/14/26</a:t>
             </a:fld>
             <a:endParaRPr lang="en-US"/>
           </a:p>
@@ -2350,10 +2429,9 @@
           <a:lstStyle/>
           <a:p>
             <a:r>
-              <a:rPr lang="en-US" smtClean="0"/>
+              <a:rPr lang="en-US"/>
               <a:t>Click to edit Master title style</a:t>
             </a:r>
-            <a:endParaRPr lang="en-US"/>
           </a:p>
         </p:txBody>
       </p:sp>
@@ -2374,7 +2452,7 @@
           <a:p>
             <a:fld id="{5BCAD085-E8A6-8845-BD4E-CB4CCA059FC4}" type="datetimeFigureOut">
               <a:rPr lang="en-US" smtClean="0"/>
-              <a:t>1/27/13</a:t>
+              <a:t>4/14/26</a:t>
             </a:fld>
             <a:endParaRPr lang="en-US"/>
           </a:p>
@@ -2469,7 +2547,7 @@
           <a:p>
             <a:fld id="{5BCAD085-E8A6-8845-BD4E-CB4CCA059FC4}" type="datetimeFigureOut">
               <a:rPr lang="en-US" smtClean="0"/>
-              <a:t>1/27/13</a:t>
+              <a:t>4/14/26</a:t>
             </a:fld>
             <a:endParaRPr lang="en-US"/>
           </a:p>
@@ -2572,10 +2650,9 @@
           </a:lstStyle>
           <a:p>
             <a:r>
-              <a:rPr lang="en-US" smtClean="0"/>
+              <a:rPr lang="en-US"/>
               <a:t>Click to edit Master title style</a:t>
             </a:r>
-            <a:endParaRPr lang="en-US"/>
           </a:p>
         </p:txBody>
       </p:sp>
@@ -2629,38 +2706,37 @@
           <a:p>
             <a:pPr lvl="0"/>
             <a:r>
-              <a:rPr lang="en-US" smtClean="0"/>
+              <a:rPr lang="en-US"/>
               <a:t>Click to edit Master text styles</a:t>
             </a:r>
           </a:p>
           <a:p>
             <a:pPr lvl="1"/>
             <a:r>
-              <a:rPr lang="en-US" smtClean="0"/>
+              <a:rPr lang="en-US"/>
               <a:t>Second level</a:t>
             </a:r>
           </a:p>
           <a:p>
             <a:pPr lvl="2"/>
             <a:r>
-              <a:rPr lang="en-US" smtClean="0"/>
+              <a:rPr lang="en-US"/>
               <a:t>Third level</a:t>
             </a:r>
           </a:p>
           <a:p>
             <a:pPr lvl="3"/>
             <a:r>
-              <a:rPr lang="en-US" smtClean="0"/>
+              <a:rPr lang="en-US"/>
               <a:t>Fourth level</a:t>
             </a:r>
           </a:p>
           <a:p>
             <a:pPr lvl="4"/>
             <a:r>
-              <a:rPr lang="en-US" smtClean="0"/>
+              <a:rPr lang="en-US"/>
               <a:t>Fifth level</a:t>
             </a:r>
-            <a:endParaRPr lang="en-US"/>
           </a:p>
         </p:txBody>
       </p:sp>
@@ -2723,7 +2799,7 @@
           <a:p>
             <a:pPr lvl="0"/>
             <a:r>
-              <a:rPr lang="en-US" smtClean="0"/>
+              <a:rPr lang="en-US"/>
               <a:t>Click to edit Master text styles</a:t>
             </a:r>
           </a:p>
@@ -2746,7 +2822,7 @@
           <a:p>
             <a:fld id="{5BCAD085-E8A6-8845-BD4E-CB4CCA059FC4}" type="datetimeFigureOut">
               <a:rPr lang="en-US" smtClean="0"/>
-              <a:t>1/27/13</a:t>
+              <a:t>4/14/26</a:t>
             </a:fld>
             <a:endParaRPr lang="en-US"/>
           </a:p>
@@ -2849,10 +2925,9 @@
           </a:lstStyle>
           <a:p>
             <a:r>
-              <a:rPr lang="en-US" smtClean="0"/>
+              <a:rPr lang="en-US"/>
               <a:t>Click to edit Master title style</a:t>
             </a:r>
-            <a:endParaRPr lang="en-US"/>
           </a:p>
         </p:txBody>
       </p:sp>
@@ -2976,7 +3051,7 @@
           <a:p>
             <a:pPr lvl="0"/>
             <a:r>
-              <a:rPr lang="en-US" smtClean="0"/>
+              <a:rPr lang="en-US"/>
               <a:t>Click to edit Master text styles</a:t>
             </a:r>
           </a:p>
@@ -2999,7 +3074,7 @@
           <a:p>
             <a:fld id="{5BCAD085-E8A6-8845-BD4E-CB4CCA059FC4}" type="datetimeFigureOut">
               <a:rPr lang="en-US" smtClean="0"/>
-              <a:t>1/27/13</a:t>
+              <a:t>4/14/26</a:t>
             </a:fld>
             <a:endParaRPr lang="en-US"/>
           </a:p>
@@ -3108,10 +3183,9 @@
           <a:lstStyle/>
           <a:p>
             <a:r>
-              <a:rPr lang="en-US" smtClean="0"/>
+              <a:rPr lang="en-US"/>
               <a:t>Click to edit Master title style</a:t>
             </a:r>
-            <a:endParaRPr lang="en-US"/>
           </a:p>
         </p:txBody>
       </p:sp>
@@ -3142,38 +3216,37 @@
           <a:p>
             <a:pPr lvl="0"/>
             <a:r>
-              <a:rPr lang="en-US" smtClean="0"/>
+              <a:rPr lang="en-US"/>
               <a:t>Click to edit Master text styles</a:t>
             </a:r>
           </a:p>
           <a:p>
             <a:pPr lvl="1"/>
             <a:r>
-              <a:rPr lang="en-US" smtClean="0"/>
+              <a:rPr lang="en-US"/>
               <a:t>Second level</a:t>
             </a:r>
           </a:p>
           <a:p>
             <a:pPr lvl="2"/>
             <a:r>
-              <a:rPr lang="en-US" smtClean="0"/>
+              <a:rPr lang="en-US"/>
               <a:t>Third level</a:t>
             </a:r>
           </a:p>
           <a:p>
             <a:pPr lvl="3"/>
             <a:r>
-              <a:rPr lang="en-US" smtClean="0"/>
+              <a:rPr lang="en-US"/>
               <a:t>Fourth level</a:t>
             </a:r>
           </a:p>
           <a:p>
             <a:pPr lvl="4"/>
             <a:r>
-              <a:rPr lang="en-US" smtClean="0"/>
+              <a:rPr lang="en-US"/>
               <a:t>Fifth level</a:t>
             </a:r>
-            <a:endParaRPr lang="en-US"/>
           </a:p>
         </p:txBody>
       </p:sp>
@@ -3212,7 +3285,7 @@
           <a:p>
             <a:fld id="{5BCAD085-E8A6-8845-BD4E-CB4CCA059FC4}" type="datetimeFigureOut">
               <a:rPr lang="en-US" smtClean="0"/>
-              <a:t>1/27/13</a:t>
+              <a:t>4/14/26</a:t>
             </a:fld>
             <a:endParaRPr lang="en-US"/>
           </a:p>
@@ -3571,7 +3644,7 @@
 </file>
 
 <file path=ppt/slides/slide1.xml><?xml version="1.0" encoding="utf-8"?>
-<p:sld xmlns:a="http://schemas.openxmlformats.org/drawingml/2006/main" xmlns:p="http://schemas.openxmlformats.org/presentationml/2006/main" xmlns:r="http://schemas.openxmlformats.org/officeDocument/2006/relationships">
+<p:sld xmlns:a="http://schemas.openxmlformats.org/drawingml/2006/main" xmlns:r="http://schemas.openxmlformats.org/officeDocument/2006/relationships" xmlns:p="http://schemas.openxmlformats.org/presentationml/2006/main">
   <p:cSld>
     <p:bg>
       <p:bgPr>
@@ -3587,7 +3660,14 @@
         <p:cNvGrpSpPr/>
         <p:nvPr/>
       </p:nvGrpSpPr>
-      <p:grpSpPr/>
+      <p:grpSpPr>
+        <a:xfrm>
+          <a:off x="0" y="0"/>
+          <a:ext cx="0" cy="0"/>
+          <a:chOff x="0" y="0"/>
+          <a:chExt cx="0" cy="0"/>
+        </a:xfrm>
+      </p:grpSpPr>
       <p:sp>
         <p:nvSpPr>
           <p:cNvPr id="2" name="Oval 1"/>
@@ -3628,6 +3708,7 @@
           <a:lstStyle/>
           <a:p>
             <a:pPr algn="ctr"/>
+            <a:endParaRPr/>
           </a:p>
         </p:txBody>
       </p:sp>
@@ -3671,6 +3752,7 @@
           <a:lstStyle/>
           <a:p>
             <a:pPr algn="ctr"/>
+            <a:endParaRPr/>
           </a:p>
         </p:txBody>
       </p:sp>
@@ -3714,6 +3796,7 @@
           <a:lstStyle/>
           <a:p>
             <a:pPr algn="ctr"/>
+            <a:endParaRPr/>
           </a:p>
         </p:txBody>
       </p:sp>
@@ -3740,7 +3823,7 @@
           <a:lstStyle/>
           <a:p>
             <a:pPr>
-              <a:defRPr b="1" sz="3400">
+              <a:defRPr sz="3400" b="1">
                 <a:solidFill>
                   <a:srgbClr val="122747"/>
                 </a:solidFill>
@@ -3857,6 +3940,7 @@
           <a:lstStyle/>
           <a:p>
             <a:pPr algn="ctr"/>
+            <a:endParaRPr/>
           </a:p>
         </p:txBody>
       </p:sp>
@@ -3883,7 +3967,7 @@
           <a:lstStyle/>
           <a:p>
             <a:pPr>
-              <a:defRPr b="1" sz="2800">
+              <a:defRPr sz="2800" b="1">
                 <a:solidFill>
                   <a:srgbClr val="122747"/>
                 </a:solidFill>
@@ -3974,6 +4058,7 @@
           <a:lstStyle/>
           <a:p>
             <a:pPr algn="ctr"/>
+            <a:endParaRPr/>
           </a:p>
         </p:txBody>
       </p:sp>
@@ -4000,7 +4085,7 @@
           <a:lstStyle/>
           <a:p>
             <a:pPr>
-              <a:defRPr b="1" sz="2800">
+              <a:defRPr sz="2800" b="1">
                 <a:solidFill>
                   <a:srgbClr val="0078D4"/>
                 </a:solidFill>
@@ -4091,6 +4176,7 @@
           <a:lstStyle/>
           <a:p>
             <a:pPr algn="ctr"/>
+            <a:endParaRPr/>
           </a:p>
         </p:txBody>
       </p:sp>
@@ -4117,7 +4203,7 @@
           <a:lstStyle/>
           <a:p>
             <a:pPr>
-              <a:defRPr b="1" sz="2800">
+              <a:defRPr sz="2800" b="1">
                 <a:solidFill>
                   <a:srgbClr val="198754"/>
                 </a:solidFill>
@@ -4242,6 +4328,7 @@
           <a:lstStyle/>
           <a:p>
             <a:pPr algn="ctr"/>
+            <a:endParaRPr/>
           </a:p>
         </p:txBody>
       </p:sp>
@@ -4326,7 +4413,7 @@
 </file>
 
 <file path=ppt/slides/slide10.xml><?xml version="1.0" encoding="utf-8"?>
-<p:sld xmlns:a="http://schemas.openxmlformats.org/drawingml/2006/main" xmlns:p="http://schemas.openxmlformats.org/presentationml/2006/main" xmlns:r="http://schemas.openxmlformats.org/officeDocument/2006/relationships">
+<p:sld xmlns:a="http://schemas.openxmlformats.org/drawingml/2006/main" xmlns:r="http://schemas.openxmlformats.org/officeDocument/2006/relationships" xmlns:p="http://schemas.openxmlformats.org/presentationml/2006/main">
   <p:cSld>
     <p:bg>
       <p:bgPr>
@@ -4342,7 +4429,14 @@
         <p:cNvGrpSpPr/>
         <p:nvPr/>
       </p:nvGrpSpPr>
-      <p:grpSpPr/>
+      <p:grpSpPr>
+        <a:xfrm>
+          <a:off x="0" y="0"/>
+          <a:ext cx="0" cy="0"/>
+          <a:chOff x="0" y="0"/>
+          <a:chExt cx="0" cy="0"/>
+        </a:xfrm>
+      </p:grpSpPr>
       <p:sp>
         <p:nvSpPr>
           <p:cNvPr id="2" name="Rectangle 1"/>
@@ -4383,6 +4477,7 @@
           <a:lstStyle/>
           <a:p>
             <a:pPr algn="ctr"/>
+            <a:endParaRPr/>
           </a:p>
         </p:txBody>
       </p:sp>
@@ -4428,7 +4523,7 @@
           <a:lstStyle/>
           <a:p>
             <a:pPr algn="ctr">
-              <a:defRPr b="1" sz="1400">
+              <a:defRPr sz="1400" b="1">
                 <a:solidFill>
                   <a:srgbClr val="0078D4"/>
                 </a:solidFill>
@@ -4464,7 +4559,7 @@
           <a:lstStyle/>
           <a:p>
             <a:pPr>
-              <a:defRPr b="1" sz="3000">
+              <a:defRPr sz="3000" b="1">
                 <a:solidFill>
                   <a:srgbClr val="122747"/>
                 </a:solidFill>
@@ -4555,6 +4650,7 @@
           <a:lstStyle/>
           <a:p>
             <a:pPr algn="ctr"/>
+            <a:endParaRPr/>
           </a:p>
         </p:txBody>
       </p:sp>
@@ -4598,6 +4694,7 @@
           <a:lstStyle/>
           <a:p>
             <a:pPr algn="ctr"/>
+            <a:endParaRPr/>
           </a:p>
         </p:txBody>
       </p:sp>
@@ -4624,7 +4721,7 @@
           <a:lstStyle/>
           <a:p>
             <a:pPr>
-              <a:defRPr b="1" sz="1800">
+              <a:defRPr sz="1800" b="1">
                 <a:solidFill>
                   <a:srgbClr val="122747"/>
                 </a:solidFill>
@@ -4778,6 +4875,7 @@
           <a:lstStyle/>
           <a:p>
             <a:pPr algn="ctr"/>
+            <a:endParaRPr/>
           </a:p>
         </p:txBody>
       </p:sp>
@@ -4821,6 +4919,7 @@
           <a:lstStyle/>
           <a:p>
             <a:pPr algn="ctr"/>
+            <a:endParaRPr/>
           </a:p>
         </p:txBody>
       </p:sp>
@@ -4847,7 +4946,7 @@
           <a:lstStyle/>
           <a:p>
             <a:pPr>
-              <a:defRPr b="1" sz="1800">
+              <a:defRPr sz="1800" b="1">
                 <a:solidFill>
                   <a:srgbClr val="122747"/>
                 </a:solidFill>
@@ -4982,6 +5081,7 @@
           <a:lstStyle/>
           <a:p>
             <a:pPr algn="ctr"/>
+            <a:endParaRPr/>
           </a:p>
         </p:txBody>
       </p:sp>
@@ -5025,6 +5125,7 @@
           <a:lstStyle/>
           <a:p>
             <a:pPr algn="ctr"/>
+            <a:endParaRPr/>
           </a:p>
         </p:txBody>
       </p:sp>
@@ -5051,7 +5152,7 @@
           <a:lstStyle/>
           <a:p>
             <a:pPr>
-              <a:defRPr b="1" sz="1800">
+              <a:defRPr sz="1800" b="1">
                 <a:solidFill>
                   <a:srgbClr val="122747"/>
                 </a:solidFill>
@@ -5165,6 +5266,7 @@
           <a:lstStyle/>
           <a:p>
             <a:pPr algn="ctr"/>
+            <a:endParaRPr/>
           </a:p>
         </p:txBody>
       </p:sp>
@@ -5249,7 +5351,7 @@
 </file>
 
 <file path=ppt/slides/slide11.xml><?xml version="1.0" encoding="utf-8"?>
-<p:sld xmlns:a="http://schemas.openxmlformats.org/drawingml/2006/main" xmlns:p="http://schemas.openxmlformats.org/presentationml/2006/main" xmlns:r="http://schemas.openxmlformats.org/officeDocument/2006/relationships">
+<p:sld xmlns:a="http://schemas.openxmlformats.org/drawingml/2006/main" xmlns:r="http://schemas.openxmlformats.org/officeDocument/2006/relationships" xmlns:p="http://schemas.openxmlformats.org/presentationml/2006/main">
   <p:cSld>
     <p:bg>
       <p:bgPr>
@@ -5265,7 +5367,14 @@
         <p:cNvGrpSpPr/>
         <p:nvPr/>
       </p:nvGrpSpPr>
-      <p:grpSpPr/>
+      <p:grpSpPr>
+        <a:xfrm>
+          <a:off x="0" y="0"/>
+          <a:ext cx="0" cy="0"/>
+          <a:chOff x="0" y="0"/>
+          <a:chExt cx="0" cy="0"/>
+        </a:xfrm>
+      </p:grpSpPr>
       <p:sp>
         <p:nvSpPr>
           <p:cNvPr id="2" name="Rectangle 1"/>
@@ -5306,6 +5415,7 @@
           <a:lstStyle/>
           <a:p>
             <a:pPr algn="ctr"/>
+            <a:endParaRPr/>
           </a:p>
         </p:txBody>
       </p:sp>
@@ -5351,7 +5461,7 @@
           <a:lstStyle/>
           <a:p>
             <a:pPr algn="ctr">
-              <a:defRPr b="1" sz="1400">
+              <a:defRPr sz="1400" b="1">
                 <a:solidFill>
                   <a:srgbClr val="0078D4"/>
                 </a:solidFill>
@@ -5387,7 +5497,7 @@
           <a:lstStyle/>
           <a:p>
             <a:pPr>
-              <a:defRPr b="1" sz="3000">
+              <a:defRPr sz="3000" b="1">
                 <a:solidFill>
                   <a:srgbClr val="122747"/>
                 </a:solidFill>
@@ -5455,10 +5565,34 @@
                 <a:tableStyleId>{5C22544A-7EE6-4342-B048-85BDC9FD1C3A}</a:tableStyleId>
               </a:tblPr>
               <a:tblGrid>
-                <a:gridCol w="1394460"/>
-                <a:gridCol w="1394460"/>
-                <a:gridCol w="1394460"/>
-                <a:gridCol w="1394460"/>
+                <a:gridCol w="1394460">
+                  <a:extLst>
+                    <a:ext uri="{9D8B030D-6E8A-4147-A177-3AD203B41FA5}">
+                      <a16:colId xmlns:a16="http://schemas.microsoft.com/office/drawing/2014/main" val="20000"/>
+                    </a:ext>
+                  </a:extLst>
+                </a:gridCol>
+                <a:gridCol w="1394460">
+                  <a:extLst>
+                    <a:ext uri="{9D8B030D-6E8A-4147-A177-3AD203B41FA5}">
+                      <a16:colId xmlns:a16="http://schemas.microsoft.com/office/drawing/2014/main" val="20001"/>
+                    </a:ext>
+                  </a:extLst>
+                </a:gridCol>
+                <a:gridCol w="1394460">
+                  <a:extLst>
+                    <a:ext uri="{9D8B030D-6E8A-4147-A177-3AD203B41FA5}">
+                      <a16:colId xmlns:a16="http://schemas.microsoft.com/office/drawing/2014/main" val="20002"/>
+                    </a:ext>
+                  </a:extLst>
+                </a:gridCol>
+                <a:gridCol w="1394460">
+                  <a:extLst>
+                    <a:ext uri="{9D8B030D-6E8A-4147-A177-3AD203B41FA5}">
+                      <a16:colId xmlns:a16="http://schemas.microsoft.com/office/drawing/2014/main" val="20003"/>
+                    </a:ext>
+                  </a:extLst>
+                </a:gridCol>
               </a:tblGrid>
               <a:tr h="512064">
                 <a:tc>
@@ -5467,7 +5601,7 @@
                     <a:lstStyle/>
                     <a:p>
                       <a:pPr algn="ctr">
-                        <a:defRPr b="1" sz="1100">
+                        <a:defRPr sz="1100" b="1">
                           <a:solidFill>
                             <a:srgbClr val="FFFFFF"/>
                           </a:solidFill>
@@ -5491,7 +5625,7 @@
                     <a:lstStyle/>
                     <a:p>
                       <a:pPr algn="ctr">
-                        <a:defRPr b="1" sz="1100">
+                        <a:defRPr sz="1100" b="1">
                           <a:solidFill>
                             <a:srgbClr val="FFFFFF"/>
                           </a:solidFill>
@@ -5515,7 +5649,7 @@
                     <a:lstStyle/>
                     <a:p>
                       <a:pPr algn="ctr">
-                        <a:defRPr b="1" sz="1100">
+                        <a:defRPr sz="1100" b="1">
                           <a:solidFill>
                             <a:srgbClr val="FFFFFF"/>
                           </a:solidFill>
@@ -5539,7 +5673,7 @@
                     <a:lstStyle/>
                     <a:p>
                       <a:pPr algn="ctr">
-                        <a:defRPr b="1" sz="1100">
+                        <a:defRPr sz="1100" b="1">
                           <a:solidFill>
                             <a:srgbClr val="FFFFFF"/>
                           </a:solidFill>
@@ -5557,6 +5691,11 @@
                     </a:solidFill>
                   </a:tcPr>
                 </a:tc>
+                <a:extLst>
+                  <a:ext uri="{0D108BD9-81ED-4DB2-BD59-A6C34878D82A}">
+                    <a16:rowId xmlns:a16="http://schemas.microsoft.com/office/drawing/2014/main" val="10000"/>
+                  </a:ext>
+                </a:extLst>
               </a:tr>
               <a:tr h="512064">
                 <a:tc>
@@ -5655,6 +5794,11 @@
                     </a:solidFill>
                   </a:tcPr>
                 </a:tc>
+                <a:extLst>
+                  <a:ext uri="{0D108BD9-81ED-4DB2-BD59-A6C34878D82A}">
+                    <a16:rowId xmlns:a16="http://schemas.microsoft.com/office/drawing/2014/main" val="10001"/>
+                  </a:ext>
+                </a:extLst>
               </a:tr>
               <a:tr h="512064">
                 <a:tc>
@@ -5753,6 +5897,11 @@
                     </a:solidFill>
                   </a:tcPr>
                 </a:tc>
+                <a:extLst>
+                  <a:ext uri="{0D108BD9-81ED-4DB2-BD59-A6C34878D82A}">
+                    <a16:rowId xmlns:a16="http://schemas.microsoft.com/office/drawing/2014/main" val="10002"/>
+                  </a:ext>
+                </a:extLst>
               </a:tr>
               <a:tr h="512064">
                 <a:tc>
@@ -5851,6 +6000,11 @@
                     </a:solidFill>
                   </a:tcPr>
                 </a:tc>
+                <a:extLst>
+                  <a:ext uri="{0D108BD9-81ED-4DB2-BD59-A6C34878D82A}">
+                    <a16:rowId xmlns:a16="http://schemas.microsoft.com/office/drawing/2014/main" val="10003"/>
+                  </a:ext>
+                </a:extLst>
               </a:tr>
               <a:tr h="512064">
                 <a:tc>
@@ -5949,6 +6103,11 @@
                     </a:solidFill>
                   </a:tcPr>
                 </a:tc>
+                <a:extLst>
+                  <a:ext uri="{0D108BD9-81ED-4DB2-BD59-A6C34878D82A}">
+                    <a16:rowId xmlns:a16="http://schemas.microsoft.com/office/drawing/2014/main" val="10004"/>
+                  </a:ext>
+                </a:extLst>
               </a:tr>
             </a:tbl>
           </a:graphicData>
@@ -5968,7 +6127,7 @@
         </p:xfrm>
         <a:graphic>
           <a:graphicData uri="http://schemas.openxmlformats.org/drawingml/2006/chart">
-            <c:chart xmlns:c="http://schemas.openxmlformats.org/drawingml/2006/chart" r:id="rId2"/>
+            <c:chart xmlns:c="http://schemas.openxmlformats.org/drawingml/2006/chart" xmlns:r="http://schemas.openxmlformats.org/officeDocument/2006/relationships" r:id="rId2"/>
           </a:graphicData>
         </a:graphic>
       </p:graphicFrame>
@@ -6054,6 +6213,7 @@
           <a:lstStyle/>
           <a:p>
             <a:pPr algn="ctr"/>
+            <a:endParaRPr/>
           </a:p>
         </p:txBody>
       </p:sp>
@@ -6138,7 +6298,7 @@
 </file>
 
 <file path=ppt/slides/slide12.xml><?xml version="1.0" encoding="utf-8"?>
-<p:sld xmlns:a="http://schemas.openxmlformats.org/drawingml/2006/main" xmlns:p="http://schemas.openxmlformats.org/presentationml/2006/main" xmlns:r="http://schemas.openxmlformats.org/officeDocument/2006/relationships">
+<p:sld xmlns:a="http://schemas.openxmlformats.org/drawingml/2006/main" xmlns:r="http://schemas.openxmlformats.org/officeDocument/2006/relationships" xmlns:p="http://schemas.openxmlformats.org/presentationml/2006/main">
   <p:cSld>
     <p:bg>
       <p:bgPr>
@@ -6154,7 +6314,14 @@
         <p:cNvGrpSpPr/>
         <p:nvPr/>
       </p:nvGrpSpPr>
-      <p:grpSpPr/>
+      <p:grpSpPr>
+        <a:xfrm>
+          <a:off x="0" y="0"/>
+          <a:ext cx="0" cy="0"/>
+          <a:chOff x="0" y="0"/>
+          <a:chExt cx="0" cy="0"/>
+        </a:xfrm>
+      </p:grpSpPr>
       <p:sp>
         <p:nvSpPr>
           <p:cNvPr id="2" name="Rectangle 1"/>
@@ -6195,6 +6362,7 @@
           <a:lstStyle/>
           <a:p>
             <a:pPr algn="ctr"/>
+            <a:endParaRPr/>
           </a:p>
         </p:txBody>
       </p:sp>
@@ -6240,7 +6408,7 @@
           <a:lstStyle/>
           <a:p>
             <a:pPr algn="ctr">
-              <a:defRPr b="1" sz="1400">
+              <a:defRPr sz="1400" b="1">
                 <a:solidFill>
                   <a:srgbClr val="0078D4"/>
                 </a:solidFill>
@@ -6276,7 +6444,7 @@
           <a:lstStyle/>
           <a:p>
             <a:pPr>
-              <a:defRPr b="1" sz="3000">
+              <a:defRPr sz="3000" b="1">
                 <a:solidFill>
                   <a:srgbClr val="122747"/>
                 </a:solidFill>
@@ -6344,9 +6512,27 @@
                 <a:tableStyleId>{5C22544A-7EE6-4342-B048-85BDC9FD1C3A}</a:tableStyleId>
               </a:tblPr>
               <a:tblGrid>
-                <a:gridCol w="1828800"/>
-                <a:gridCol w="1828800"/>
-                <a:gridCol w="1828800"/>
+                <a:gridCol w="1828800">
+                  <a:extLst>
+                    <a:ext uri="{9D8B030D-6E8A-4147-A177-3AD203B41FA5}">
+                      <a16:colId xmlns:a16="http://schemas.microsoft.com/office/drawing/2014/main" val="20000"/>
+                    </a:ext>
+                  </a:extLst>
+                </a:gridCol>
+                <a:gridCol w="1828800">
+                  <a:extLst>
+                    <a:ext uri="{9D8B030D-6E8A-4147-A177-3AD203B41FA5}">
+                      <a16:colId xmlns:a16="http://schemas.microsoft.com/office/drawing/2014/main" val="20001"/>
+                    </a:ext>
+                  </a:extLst>
+                </a:gridCol>
+                <a:gridCol w="1828800">
+                  <a:extLst>
+                    <a:ext uri="{9D8B030D-6E8A-4147-A177-3AD203B41FA5}">
+                      <a16:colId xmlns:a16="http://schemas.microsoft.com/office/drawing/2014/main" val="20002"/>
+                    </a:ext>
+                  </a:extLst>
+                </a:gridCol>
               </a:tblGrid>
               <a:tr h="512064">
                 <a:tc>
@@ -6355,7 +6541,7 @@
                     <a:lstStyle/>
                     <a:p>
                       <a:pPr algn="ctr">
-                        <a:defRPr b="1" sz="1100">
+                        <a:defRPr sz="1100" b="1">
                           <a:solidFill>
                             <a:srgbClr val="FFFFFF"/>
                           </a:solidFill>
@@ -6379,7 +6565,7 @@
                     <a:lstStyle/>
                     <a:p>
                       <a:pPr algn="ctr">
-                        <a:defRPr b="1" sz="1100">
+                        <a:defRPr sz="1100" b="1">
                           <a:solidFill>
                             <a:srgbClr val="FFFFFF"/>
                           </a:solidFill>
@@ -6403,7 +6589,7 @@
                     <a:lstStyle/>
                     <a:p>
                       <a:pPr algn="ctr">
-                        <a:defRPr b="1" sz="1100">
+                        <a:defRPr sz="1100" b="1">
                           <a:solidFill>
                             <a:srgbClr val="FFFFFF"/>
                           </a:solidFill>
@@ -6421,6 +6607,11 @@
                     </a:solidFill>
                   </a:tcPr>
                 </a:tc>
+                <a:extLst>
+                  <a:ext uri="{0D108BD9-81ED-4DB2-BD59-A6C34878D82A}">
+                    <a16:rowId xmlns:a16="http://schemas.microsoft.com/office/drawing/2014/main" val="10000"/>
+                  </a:ext>
+                </a:extLst>
               </a:tr>
               <a:tr h="512064">
                 <a:tc>
@@ -6495,6 +6686,11 @@
                     </a:solidFill>
                   </a:tcPr>
                 </a:tc>
+                <a:extLst>
+                  <a:ext uri="{0D108BD9-81ED-4DB2-BD59-A6C34878D82A}">
+                    <a16:rowId xmlns:a16="http://schemas.microsoft.com/office/drawing/2014/main" val="10001"/>
+                  </a:ext>
+                </a:extLst>
               </a:tr>
               <a:tr h="512064">
                 <a:tc>
@@ -6569,6 +6765,11 @@
                     </a:solidFill>
                   </a:tcPr>
                 </a:tc>
+                <a:extLst>
+                  <a:ext uri="{0D108BD9-81ED-4DB2-BD59-A6C34878D82A}">
+                    <a16:rowId xmlns:a16="http://schemas.microsoft.com/office/drawing/2014/main" val="10002"/>
+                  </a:ext>
+                </a:extLst>
               </a:tr>
               <a:tr h="512064">
                 <a:tc>
@@ -6643,6 +6844,11 @@
                     </a:solidFill>
                   </a:tcPr>
                 </a:tc>
+                <a:extLst>
+                  <a:ext uri="{0D108BD9-81ED-4DB2-BD59-A6C34878D82A}">
+                    <a16:rowId xmlns:a16="http://schemas.microsoft.com/office/drawing/2014/main" val="10003"/>
+                  </a:ext>
+                </a:extLst>
               </a:tr>
               <a:tr h="512064">
                 <a:tc>
@@ -6717,6 +6923,11 @@
                     </a:solidFill>
                   </a:tcPr>
                 </a:tc>
+                <a:extLst>
+                  <a:ext uri="{0D108BD9-81ED-4DB2-BD59-A6C34878D82A}">
+                    <a16:rowId xmlns:a16="http://schemas.microsoft.com/office/drawing/2014/main" val="10004"/>
+                  </a:ext>
+                </a:extLst>
               </a:tr>
             </a:tbl>
           </a:graphicData>
@@ -6764,6 +6975,7 @@
           <a:lstStyle/>
           <a:p>
             <a:pPr algn="ctr"/>
+            <a:endParaRPr/>
           </a:p>
         </p:txBody>
       </p:sp>
@@ -6790,7 +7002,7 @@
           <a:lstStyle/>
           <a:p>
             <a:pPr>
-              <a:defRPr b="1" sz="2800">
+              <a:defRPr sz="2800" b="1">
                 <a:solidFill>
                   <a:srgbClr val="198754"/>
                 </a:solidFill>
@@ -6881,6 +7093,7 @@
           <a:lstStyle/>
           <a:p>
             <a:pPr algn="ctr"/>
+            <a:endParaRPr/>
           </a:p>
         </p:txBody>
       </p:sp>
@@ -6907,7 +7120,7 @@
           <a:lstStyle/>
           <a:p>
             <a:pPr>
-              <a:defRPr b="1" sz="2800">
+              <a:defRPr sz="2800" b="1">
                 <a:solidFill>
                   <a:srgbClr val="0078D4"/>
                 </a:solidFill>
@@ -7038,6 +7251,7 @@
           <a:lstStyle/>
           <a:p>
             <a:pPr algn="ctr"/>
+            <a:endParaRPr/>
           </a:p>
         </p:txBody>
       </p:sp>
@@ -7122,7 +7336,7 @@
 </file>
 
 <file path=ppt/slides/slide13.xml><?xml version="1.0" encoding="utf-8"?>
-<p:sld xmlns:a="http://schemas.openxmlformats.org/drawingml/2006/main" xmlns:p="http://schemas.openxmlformats.org/presentationml/2006/main" xmlns:r="http://schemas.openxmlformats.org/officeDocument/2006/relationships">
+<p:sld xmlns:a="http://schemas.openxmlformats.org/drawingml/2006/main" xmlns:r="http://schemas.openxmlformats.org/officeDocument/2006/relationships" xmlns:p="http://schemas.openxmlformats.org/presentationml/2006/main">
   <p:cSld>
     <p:bg>
       <p:bgPr>
@@ -7138,7 +7352,14 @@
         <p:cNvGrpSpPr/>
         <p:nvPr/>
       </p:nvGrpSpPr>
-      <p:grpSpPr/>
+      <p:grpSpPr>
+        <a:xfrm>
+          <a:off x="0" y="0"/>
+          <a:ext cx="0" cy="0"/>
+          <a:chOff x="0" y="0"/>
+          <a:chExt cx="0" cy="0"/>
+        </a:xfrm>
+      </p:grpSpPr>
       <p:sp>
         <p:nvSpPr>
           <p:cNvPr id="2" name="Rectangle 1"/>
@@ -7179,6 +7400,7 @@
           <a:lstStyle/>
           <a:p>
             <a:pPr algn="ctr"/>
+            <a:endParaRPr/>
           </a:p>
         </p:txBody>
       </p:sp>
@@ -7224,7 +7446,7 @@
           <a:lstStyle/>
           <a:p>
             <a:pPr algn="ctr">
-              <a:defRPr b="1" sz="1400">
+              <a:defRPr sz="1400" b="1">
                 <a:solidFill>
                   <a:srgbClr val="0078D4"/>
                 </a:solidFill>
@@ -7260,7 +7482,7 @@
           <a:lstStyle/>
           <a:p>
             <a:pPr>
-              <a:defRPr b="1" sz="3000">
+              <a:defRPr sz="3000" b="1">
                 <a:solidFill>
                   <a:srgbClr val="122747"/>
                 </a:solidFill>
@@ -7351,6 +7573,7 @@
           <a:lstStyle/>
           <a:p>
             <a:pPr algn="ctr"/>
+            <a:endParaRPr/>
           </a:p>
         </p:txBody>
       </p:sp>
@@ -7394,6 +7617,7 @@
           <a:lstStyle/>
           <a:p>
             <a:pPr algn="ctr"/>
+            <a:endParaRPr/>
           </a:p>
         </p:txBody>
       </p:sp>
@@ -7420,7 +7644,7 @@
           <a:lstStyle/>
           <a:p>
             <a:pPr>
-              <a:defRPr b="1" sz="1800">
+              <a:defRPr sz="1800" b="1">
                 <a:solidFill>
                   <a:srgbClr val="122747"/>
                 </a:solidFill>
@@ -7555,6 +7779,7 @@
           <a:lstStyle/>
           <a:p>
             <a:pPr algn="ctr"/>
+            <a:endParaRPr/>
           </a:p>
         </p:txBody>
       </p:sp>
@@ -7598,6 +7823,7 @@
           <a:lstStyle/>
           <a:p>
             <a:pPr algn="ctr"/>
+            <a:endParaRPr/>
           </a:p>
         </p:txBody>
       </p:sp>
@@ -7624,7 +7850,7 @@
           <a:lstStyle/>
           <a:p>
             <a:pPr>
-              <a:defRPr b="1" sz="1800">
+              <a:defRPr sz="1800" b="1">
                 <a:solidFill>
                   <a:srgbClr val="122747"/>
                 </a:solidFill>
@@ -7759,6 +7985,7 @@
           <a:lstStyle/>
           <a:p>
             <a:pPr algn="ctr"/>
+            <a:endParaRPr/>
           </a:p>
         </p:txBody>
       </p:sp>
@@ -7802,6 +8029,7 @@
           <a:lstStyle/>
           <a:p>
             <a:pPr algn="ctr"/>
+            <a:endParaRPr/>
           </a:p>
         </p:txBody>
       </p:sp>
@@ -7828,7 +8056,7 @@
           <a:lstStyle/>
           <a:p>
             <a:pPr>
-              <a:defRPr b="1" sz="1800">
+              <a:defRPr sz="1800" b="1">
                 <a:solidFill>
                   <a:srgbClr val="122747"/>
                 </a:solidFill>
@@ -7980,6 +8208,7 @@
           <a:lstStyle/>
           <a:p>
             <a:pPr algn="ctr"/>
+            <a:endParaRPr/>
           </a:p>
         </p:txBody>
       </p:sp>
@@ -8064,7 +8293,7 @@
 </file>
 
 <file path=ppt/slides/slide14.xml><?xml version="1.0" encoding="utf-8"?>
-<p:sld xmlns:a="http://schemas.openxmlformats.org/drawingml/2006/main" xmlns:p="http://schemas.openxmlformats.org/presentationml/2006/main" xmlns:r="http://schemas.openxmlformats.org/officeDocument/2006/relationships">
+<p:sld xmlns:a="http://schemas.openxmlformats.org/drawingml/2006/main" xmlns:r="http://schemas.openxmlformats.org/officeDocument/2006/relationships" xmlns:p="http://schemas.openxmlformats.org/presentationml/2006/main">
   <p:cSld>
     <p:bg>
       <p:bgPr>
@@ -8080,7 +8309,14 @@
         <p:cNvGrpSpPr/>
         <p:nvPr/>
       </p:nvGrpSpPr>
-      <p:grpSpPr/>
+      <p:grpSpPr>
+        <a:xfrm>
+          <a:off x="0" y="0"/>
+          <a:ext cx="0" cy="0"/>
+          <a:chOff x="0" y="0"/>
+          <a:chExt cx="0" cy="0"/>
+        </a:xfrm>
+      </p:grpSpPr>
       <p:sp>
         <p:nvSpPr>
           <p:cNvPr id="2" name="Rectangle 1"/>
@@ -8121,6 +8357,7 @@
           <a:lstStyle/>
           <a:p>
             <a:pPr algn="ctr"/>
+            <a:endParaRPr/>
           </a:p>
         </p:txBody>
       </p:sp>
@@ -8166,7 +8403,7 @@
           <a:lstStyle/>
           <a:p>
             <a:pPr algn="ctr">
-              <a:defRPr b="1" sz="1400">
+              <a:defRPr sz="1400" b="1">
                 <a:solidFill>
                   <a:srgbClr val="0078D4"/>
                 </a:solidFill>
@@ -8202,7 +8439,7 @@
           <a:lstStyle/>
           <a:p>
             <a:pPr>
-              <a:defRPr b="1" sz="3000">
+              <a:defRPr sz="3000" b="1">
                 <a:solidFill>
                   <a:srgbClr val="122747"/>
                 </a:solidFill>
@@ -8293,6 +8530,7 @@
           <a:lstStyle/>
           <a:p>
             <a:pPr algn="ctr"/>
+            <a:endParaRPr/>
           </a:p>
         </p:txBody>
       </p:sp>
@@ -8319,7 +8557,7 @@
           <a:lstStyle/>
           <a:p>
             <a:pPr>
-              <a:defRPr b="1" sz="2800">
+              <a:defRPr sz="2800" b="1">
                 <a:solidFill>
                   <a:srgbClr val="122747"/>
                 </a:solidFill>
@@ -8410,6 +8648,7 @@
           <a:lstStyle/>
           <a:p>
             <a:pPr algn="ctr"/>
+            <a:endParaRPr/>
           </a:p>
         </p:txBody>
       </p:sp>
@@ -8436,7 +8675,7 @@
           <a:lstStyle/>
           <a:p>
             <a:pPr>
-              <a:defRPr b="1" sz="2800">
+              <a:defRPr sz="2800" b="1">
                 <a:solidFill>
                   <a:srgbClr val="122747"/>
                 </a:solidFill>
@@ -8527,6 +8766,7 @@
           <a:lstStyle/>
           <a:p>
             <a:pPr algn="ctr"/>
+            <a:endParaRPr/>
           </a:p>
         </p:txBody>
       </p:sp>
@@ -8553,7 +8793,7 @@
           <a:lstStyle/>
           <a:p>
             <a:pPr>
-              <a:defRPr b="1" sz="2800">
+              <a:defRPr sz="2800" b="1">
                 <a:solidFill>
                   <a:srgbClr val="0078D4"/>
                 </a:solidFill>
@@ -8680,6 +8920,7 @@
           <a:lstStyle/>
           <a:p>
             <a:pPr algn="ctr"/>
+            <a:endParaRPr/>
           </a:p>
         </p:txBody>
       </p:sp>
@@ -8706,7 +8947,7 @@
           <a:lstStyle/>
           <a:p>
             <a:pPr>
-              <a:defRPr b="1" sz="2800">
+              <a:defRPr sz="2800" b="1">
                 <a:solidFill>
                   <a:srgbClr val="198754"/>
                 </a:solidFill>
@@ -8805,7 +9046,7 @@
         </p:xfrm>
         <a:graphic>
           <a:graphicData uri="http://schemas.openxmlformats.org/drawingml/2006/chart">
-            <c:chart xmlns:c="http://schemas.openxmlformats.org/drawingml/2006/chart" r:id="rId2"/>
+            <c:chart xmlns:c="http://schemas.openxmlformats.org/drawingml/2006/chart" xmlns:r="http://schemas.openxmlformats.org/officeDocument/2006/relationships" r:id="rId2"/>
           </a:graphicData>
         </a:graphic>
       </p:graphicFrame>
@@ -8929,6 +9170,7 @@
           <a:lstStyle/>
           <a:p>
             <a:pPr algn="ctr"/>
+            <a:endParaRPr/>
           </a:p>
         </p:txBody>
       </p:sp>
@@ -9013,7 +9255,7 @@
 </file>
 
 <file path=ppt/slides/slide15.xml><?xml version="1.0" encoding="utf-8"?>
-<p:sld xmlns:a="http://schemas.openxmlformats.org/drawingml/2006/main" xmlns:p="http://schemas.openxmlformats.org/presentationml/2006/main" xmlns:r="http://schemas.openxmlformats.org/officeDocument/2006/relationships">
+<p:sld xmlns:a="http://schemas.openxmlformats.org/drawingml/2006/main" xmlns:r="http://schemas.openxmlformats.org/officeDocument/2006/relationships" xmlns:p="http://schemas.openxmlformats.org/presentationml/2006/main">
   <p:cSld>
     <p:bg>
       <p:bgPr>
@@ -9029,7 +9271,14 @@
         <p:cNvGrpSpPr/>
         <p:nvPr/>
       </p:nvGrpSpPr>
-      <p:grpSpPr/>
+      <p:grpSpPr>
+        <a:xfrm>
+          <a:off x="0" y="0"/>
+          <a:ext cx="0" cy="0"/>
+          <a:chOff x="0" y="0"/>
+          <a:chExt cx="0" cy="0"/>
+        </a:xfrm>
+      </p:grpSpPr>
       <p:sp>
         <p:nvSpPr>
           <p:cNvPr id="2" name="Rectangle 1"/>
@@ -9070,6 +9319,7 @@
           <a:lstStyle/>
           <a:p>
             <a:pPr algn="ctr"/>
+            <a:endParaRPr/>
           </a:p>
         </p:txBody>
       </p:sp>
@@ -9115,7 +9365,7 @@
           <a:lstStyle/>
           <a:p>
             <a:pPr algn="ctr">
-              <a:defRPr b="1" sz="1400">
+              <a:defRPr sz="1400" b="1">
                 <a:solidFill>
                   <a:srgbClr val="0078D4"/>
                 </a:solidFill>
@@ -9151,7 +9401,7 @@
           <a:lstStyle/>
           <a:p>
             <a:pPr>
-              <a:defRPr b="1" sz="3000">
+              <a:defRPr sz="3000" b="1">
                 <a:solidFill>
                   <a:srgbClr val="122747"/>
                 </a:solidFill>
@@ -9242,6 +9492,7 @@
           <a:lstStyle/>
           <a:p>
             <a:pPr algn="ctr"/>
+            <a:endParaRPr/>
           </a:p>
         </p:txBody>
       </p:sp>
@@ -9285,6 +9536,7 @@
           <a:lstStyle/>
           <a:p>
             <a:pPr algn="ctr"/>
+            <a:endParaRPr/>
           </a:p>
         </p:txBody>
       </p:sp>
@@ -9311,7 +9563,7 @@
           <a:lstStyle/>
           <a:p>
             <a:pPr>
-              <a:defRPr b="1" sz="1800">
+              <a:defRPr sz="1800" b="1">
                 <a:solidFill>
                   <a:srgbClr val="122747"/>
                 </a:solidFill>
@@ -9465,6 +9717,7 @@
           <a:lstStyle/>
           <a:p>
             <a:pPr algn="ctr"/>
+            <a:endParaRPr/>
           </a:p>
         </p:txBody>
       </p:sp>
@@ -9508,6 +9761,7 @@
           <a:lstStyle/>
           <a:p>
             <a:pPr algn="ctr"/>
+            <a:endParaRPr/>
           </a:p>
         </p:txBody>
       </p:sp>
@@ -9534,7 +9788,7 @@
           <a:lstStyle/>
           <a:p>
             <a:pPr>
-              <a:defRPr b="1" sz="1800">
+              <a:defRPr sz="1800" b="1">
                 <a:solidFill>
                   <a:srgbClr val="122747"/>
                 </a:solidFill>
@@ -9686,6 +9940,7 @@
           <a:lstStyle/>
           <a:p>
             <a:pPr algn="ctr"/>
+            <a:endParaRPr/>
           </a:p>
         </p:txBody>
       </p:sp>
@@ -9770,7 +10025,7 @@
 </file>
 
 <file path=ppt/slides/slide16.xml><?xml version="1.0" encoding="utf-8"?>
-<p:sld xmlns:a="http://schemas.openxmlformats.org/drawingml/2006/main" xmlns:p="http://schemas.openxmlformats.org/presentationml/2006/main" xmlns:r="http://schemas.openxmlformats.org/officeDocument/2006/relationships">
+<p:sld xmlns:a="http://schemas.openxmlformats.org/drawingml/2006/main" xmlns:r="http://schemas.openxmlformats.org/officeDocument/2006/relationships" xmlns:p="http://schemas.openxmlformats.org/presentationml/2006/main">
   <p:cSld>
     <p:bg>
       <p:bgPr>
@@ -9786,7 +10041,14 @@
         <p:cNvGrpSpPr/>
         <p:nvPr/>
       </p:nvGrpSpPr>
-      <p:grpSpPr/>
+      <p:grpSpPr>
+        <a:xfrm>
+          <a:off x="0" y="0"/>
+          <a:ext cx="0" cy="0"/>
+          <a:chOff x="0" y="0"/>
+          <a:chExt cx="0" cy="0"/>
+        </a:xfrm>
+      </p:grpSpPr>
       <p:sp>
         <p:nvSpPr>
           <p:cNvPr id="2" name="Oval 1"/>
@@ -9827,6 +10089,7 @@
           <a:lstStyle/>
           <a:p>
             <a:pPr algn="ctr"/>
+            <a:endParaRPr/>
           </a:p>
         </p:txBody>
       </p:sp>
@@ -9870,6 +10133,7 @@
           <a:lstStyle/>
           <a:p>
             <a:pPr algn="ctr"/>
+            <a:endParaRPr/>
           </a:p>
         </p:txBody>
       </p:sp>
@@ -9913,6 +10177,7 @@
           <a:lstStyle/>
           <a:p>
             <a:pPr algn="ctr"/>
+            <a:endParaRPr/>
           </a:p>
         </p:txBody>
       </p:sp>
@@ -9958,7 +10223,7 @@
           <a:lstStyle/>
           <a:p>
             <a:pPr algn="ctr">
-              <a:defRPr b="1" sz="1400">
+              <a:defRPr sz="1400" b="1">
                 <a:solidFill>
                   <a:srgbClr val="0078D4"/>
                 </a:solidFill>
@@ -9994,7 +10259,7 @@
           <a:lstStyle/>
           <a:p>
             <a:pPr>
-              <a:defRPr b="1" sz="3000">
+              <a:defRPr sz="3000" b="1">
                 <a:solidFill>
                   <a:srgbClr val="122747"/>
                 </a:solidFill>
@@ -10052,7 +10317,7 @@
         <p:spPr>
           <a:xfrm>
             <a:off x="731520" y="1874519"/>
-            <a:ext cx="6583680" cy="2651760"/>
+            <a:ext cx="6583680" cy="1906932"/>
           </a:xfrm>
           <a:prstGeom prst="rect">
             <a:avLst/>
@@ -10080,6 +10345,7 @@
               </a:defRPr>
             </a:pPr>
             <a:r>
+              <a:rPr dirty="0"/>
               <a:t>The project delivered a stable Apple Silicon pipeline, a corrected attention model, and a reusable cross-dataset evaluation workflow.</a:t>
             </a:r>
           </a:p>
@@ -10099,26 +10365,8 @@
               </a:defRPr>
             </a:pPr>
             <a:r>
-              <a:t>Attention v2 is clearly better than attention v1 and shows modest promise on a second dataset.</a:t>
-            </a:r>
-          </a:p>
-          <a:p>
-            <a:pPr>
-              <a:lnSpc>
-                <a:spcPct val="118000"/>
-              </a:lnSpc>
-              <a:spcAft>
-                <a:spcPts val="800"/>
-              </a:spcAft>
-              <a:defRPr sz="1900">
-                <a:solidFill>
-                  <a:srgbClr val="233248"/>
-                </a:solidFill>
-                <a:latin typeface="Avenir Next"/>
-              </a:defRPr>
-            </a:pPr>
-            <a:r>
-              <a:t>However, the strongest PointNet++ SSG baseline remains the best ModelNet40 model in this project.</a:t>
+              <a:rPr dirty="0"/>
+              <a:t>Attention v2 is clearly better than attention v1 and shows modest promise on a second dataset</a:t>
             </a:r>
           </a:p>
         </p:txBody>
@@ -10165,6 +10413,7 @@
           <a:lstStyle/>
           <a:p>
             <a:pPr algn="ctr"/>
+            <a:endParaRPr/>
           </a:p>
         </p:txBody>
       </p:sp>
@@ -10191,7 +10440,7 @@
           <a:lstStyle/>
           <a:p>
             <a:pPr>
-              <a:defRPr b="1" sz="2800">
+              <a:defRPr sz="2800" b="1">
                 <a:solidFill>
                   <a:srgbClr val="122747"/>
                 </a:solidFill>
@@ -10282,6 +10531,7 @@
           <a:lstStyle/>
           <a:p>
             <a:pPr algn="ctr"/>
+            <a:endParaRPr/>
           </a:p>
         </p:txBody>
       </p:sp>
@@ -10308,7 +10558,7 @@
           <a:lstStyle/>
           <a:p>
             <a:pPr>
-              <a:defRPr b="1" sz="2800">
+              <a:defRPr sz="2800" b="1">
                 <a:solidFill>
                   <a:srgbClr val="0078D4"/>
                 </a:solidFill>
@@ -10397,6 +10647,7 @@
           <a:lstStyle/>
           <a:p>
             <a:pPr algn="ctr"/>
+            <a:endParaRPr/>
           </a:p>
         </p:txBody>
       </p:sp>
@@ -10481,7 +10732,7 @@
 </file>
 
 <file path=ppt/slides/slide2.xml><?xml version="1.0" encoding="utf-8"?>
-<p:sld xmlns:a="http://schemas.openxmlformats.org/drawingml/2006/main" xmlns:p="http://schemas.openxmlformats.org/presentationml/2006/main" xmlns:r="http://schemas.openxmlformats.org/officeDocument/2006/relationships">
+<p:sld xmlns:a="http://schemas.openxmlformats.org/drawingml/2006/main" xmlns:r="http://schemas.openxmlformats.org/officeDocument/2006/relationships" xmlns:p="http://schemas.openxmlformats.org/presentationml/2006/main">
   <p:cSld>
     <p:bg>
       <p:bgPr>
@@ -10497,7 +10748,14 @@
         <p:cNvGrpSpPr/>
         <p:nvPr/>
       </p:nvGrpSpPr>
-      <p:grpSpPr/>
+      <p:grpSpPr>
+        <a:xfrm>
+          <a:off x="0" y="0"/>
+          <a:ext cx="0" cy="0"/>
+          <a:chOff x="0" y="0"/>
+          <a:chExt cx="0" cy="0"/>
+        </a:xfrm>
+      </p:grpSpPr>
       <p:sp>
         <p:nvSpPr>
           <p:cNvPr id="2" name="Rectangle 1"/>
@@ -10538,6 +10796,7 @@
           <a:lstStyle/>
           <a:p>
             <a:pPr algn="ctr"/>
+            <a:endParaRPr/>
           </a:p>
         </p:txBody>
       </p:sp>
@@ -10583,7 +10842,7 @@
           <a:lstStyle/>
           <a:p>
             <a:pPr algn="ctr">
-              <a:defRPr b="1" sz="1400">
+              <a:defRPr sz="1400" b="1">
                 <a:solidFill>
                   <a:srgbClr val="0078D4"/>
                 </a:solidFill>
@@ -10619,7 +10878,7 @@
           <a:lstStyle/>
           <a:p>
             <a:pPr>
-              <a:defRPr b="1" sz="3000">
+              <a:defRPr sz="3000" b="1">
                 <a:solidFill>
                   <a:srgbClr val="122747"/>
                 </a:solidFill>
@@ -10710,6 +10969,7 @@
           <a:lstStyle/>
           <a:p>
             <a:pPr algn="ctr"/>
+            <a:endParaRPr/>
           </a:p>
         </p:txBody>
       </p:sp>
@@ -10753,6 +11013,7 @@
           <a:lstStyle/>
           <a:p>
             <a:pPr algn="ctr"/>
+            <a:endParaRPr/>
           </a:p>
         </p:txBody>
       </p:sp>
@@ -10779,7 +11040,7 @@
           <a:lstStyle/>
           <a:p>
             <a:pPr>
-              <a:defRPr b="1" sz="1800">
+              <a:defRPr sz="1800" b="1">
                 <a:solidFill>
                   <a:srgbClr val="122747"/>
                 </a:solidFill>
@@ -10914,6 +11175,7 @@
           <a:lstStyle/>
           <a:p>
             <a:pPr algn="ctr"/>
+            <a:endParaRPr/>
           </a:p>
         </p:txBody>
       </p:sp>
@@ -10957,6 +11219,7 @@
           <a:lstStyle/>
           <a:p>
             <a:pPr algn="ctr"/>
+            <a:endParaRPr/>
           </a:p>
         </p:txBody>
       </p:sp>
@@ -10983,7 +11246,7 @@
           <a:lstStyle/>
           <a:p>
             <a:pPr>
-              <a:defRPr b="1" sz="1800">
+              <a:defRPr sz="1800" b="1">
                 <a:solidFill>
                   <a:srgbClr val="122747"/>
                 </a:solidFill>
@@ -11118,6 +11381,7 @@
           <a:lstStyle/>
           <a:p>
             <a:pPr algn="ctr"/>
+            <a:endParaRPr/>
           </a:p>
         </p:txBody>
       </p:sp>
@@ -11161,6 +11425,7 @@
           <a:lstStyle/>
           <a:p>
             <a:pPr algn="ctr"/>
+            <a:endParaRPr/>
           </a:p>
         </p:txBody>
       </p:sp>
@@ -11187,7 +11452,7 @@
           <a:lstStyle/>
           <a:p>
             <a:pPr>
-              <a:defRPr b="1" sz="1800">
+              <a:defRPr sz="1800" b="1">
                 <a:solidFill>
                   <a:srgbClr val="122747"/>
                 </a:solidFill>
@@ -11320,6 +11585,7 @@
           <a:lstStyle/>
           <a:p>
             <a:pPr algn="ctr"/>
+            <a:endParaRPr/>
           </a:p>
         </p:txBody>
       </p:sp>
@@ -11404,7 +11670,7 @@
 </file>
 
 <file path=ppt/slides/slide3.xml><?xml version="1.0" encoding="utf-8"?>
-<p:sld xmlns:a="http://schemas.openxmlformats.org/drawingml/2006/main" xmlns:p="http://schemas.openxmlformats.org/presentationml/2006/main" xmlns:r="http://schemas.openxmlformats.org/officeDocument/2006/relationships">
+<p:sld xmlns:a="http://schemas.openxmlformats.org/drawingml/2006/main" xmlns:r="http://schemas.openxmlformats.org/officeDocument/2006/relationships" xmlns:p="http://schemas.openxmlformats.org/presentationml/2006/main">
   <p:cSld>
     <p:bg>
       <p:bgPr>
@@ -11420,7 +11686,14 @@
         <p:cNvGrpSpPr/>
         <p:nvPr/>
       </p:nvGrpSpPr>
-      <p:grpSpPr/>
+      <p:grpSpPr>
+        <a:xfrm>
+          <a:off x="0" y="0"/>
+          <a:ext cx="0" cy="0"/>
+          <a:chOff x="0" y="0"/>
+          <a:chExt cx="0" cy="0"/>
+        </a:xfrm>
+      </p:grpSpPr>
       <p:sp>
         <p:nvSpPr>
           <p:cNvPr id="2" name="Rectangle 1"/>
@@ -11461,6 +11734,7 @@
           <a:lstStyle/>
           <a:p>
             <a:pPr algn="ctr"/>
+            <a:endParaRPr/>
           </a:p>
         </p:txBody>
       </p:sp>
@@ -11506,7 +11780,7 @@
           <a:lstStyle/>
           <a:p>
             <a:pPr algn="ctr">
-              <a:defRPr b="1" sz="1400">
+              <a:defRPr sz="1400" b="1">
                 <a:solidFill>
                   <a:srgbClr val="0078D4"/>
                 </a:solidFill>
@@ -11542,7 +11816,7 @@
           <a:lstStyle/>
           <a:p>
             <a:pPr>
-              <a:defRPr b="1" sz="3000">
+              <a:defRPr sz="3000" b="1">
                 <a:solidFill>
                   <a:srgbClr val="122747"/>
                 </a:solidFill>
@@ -11673,6 +11947,7 @@
           <a:lstStyle/>
           <a:p>
             <a:pPr algn="ctr"/>
+            <a:endParaRPr/>
           </a:p>
         </p:txBody>
       </p:sp>
@@ -11716,6 +11991,7 @@
           <a:lstStyle/>
           <a:p>
             <a:pPr algn="ctr"/>
+            <a:endParaRPr/>
           </a:p>
         </p:txBody>
       </p:sp>
@@ -11799,6 +12075,7 @@
           <a:lstStyle/>
           <a:p>
             <a:pPr algn="ctr"/>
+            <a:endParaRPr/>
           </a:p>
         </p:txBody>
       </p:sp>
@@ -11882,6 +12159,7 @@
           <a:lstStyle/>
           <a:p>
             <a:pPr algn="ctr"/>
+            <a:endParaRPr/>
           </a:p>
         </p:txBody>
       </p:sp>
@@ -11965,6 +12243,7 @@
           <a:lstStyle/>
           <a:p>
             <a:pPr algn="ctr"/>
+            <a:endParaRPr/>
           </a:p>
         </p:txBody>
       </p:sp>
@@ -12048,6 +12327,7 @@
           <a:lstStyle/>
           <a:p>
             <a:pPr algn="ctr"/>
+            <a:endParaRPr/>
           </a:p>
         </p:txBody>
       </p:sp>
@@ -12131,6 +12411,7 @@
           <a:lstStyle/>
           <a:p>
             <a:pPr algn="ctr"/>
+            <a:endParaRPr/>
           </a:p>
         </p:txBody>
       </p:sp>
@@ -12216,6 +12497,7 @@
           <a:lstStyle/>
           <a:p>
             <a:pPr algn="ctr"/>
+            <a:endParaRPr/>
           </a:p>
         </p:txBody>
       </p:sp>
@@ -12259,6 +12541,7 @@
           <a:lstStyle/>
           <a:p>
             <a:pPr algn="ctr"/>
+            <a:endParaRPr/>
           </a:p>
         </p:txBody>
       </p:sp>
@@ -12285,7 +12568,7 @@
           <a:lstStyle/>
           <a:p>
             <a:pPr>
-              <a:defRPr b="1" sz="1600">
+              <a:defRPr sz="1600" b="1">
                 <a:solidFill>
                   <a:srgbClr val="122747"/>
                 </a:solidFill>
@@ -12382,6 +12665,7 @@
           <a:lstStyle/>
           <a:p>
             <a:pPr algn="ctr"/>
+            <a:endParaRPr/>
           </a:p>
         </p:txBody>
       </p:sp>
@@ -12425,6 +12709,7 @@
           <a:lstStyle/>
           <a:p>
             <a:pPr algn="ctr"/>
+            <a:endParaRPr/>
           </a:p>
         </p:txBody>
       </p:sp>
@@ -12451,7 +12736,7 @@
           <a:lstStyle/>
           <a:p>
             <a:pPr>
-              <a:defRPr b="1" sz="1600">
+              <a:defRPr sz="1600" b="1">
                 <a:solidFill>
                   <a:srgbClr val="122747"/>
                 </a:solidFill>
@@ -12473,7 +12758,7 @@
         <p:spPr>
           <a:xfrm>
             <a:off x="4645152" y="5495544"/>
-            <a:ext cx="2916936" cy="393192"/>
+            <a:ext cx="3081528" cy="400494"/>
           </a:xfrm>
           <a:prstGeom prst="rect">
             <a:avLst/>
@@ -12501,7 +12786,8 @@
               </a:defRPr>
             </a:pPr>
             <a:r>
-              <a:t>codex/pointnet2-attn-v2-mac-safe</a:t>
+              <a:rPr dirty="0"/>
+              <a:t>pointnet2-attn-v2-mac-safe</a:t>
             </a:r>
           </a:p>
         </p:txBody>
@@ -12548,6 +12834,7 @@
           <a:lstStyle/>
           <a:p>
             <a:pPr algn="ctr"/>
+            <a:endParaRPr/>
           </a:p>
         </p:txBody>
       </p:sp>
@@ -12591,6 +12878,7 @@
           <a:lstStyle/>
           <a:p>
             <a:pPr algn="ctr"/>
+            <a:endParaRPr/>
           </a:p>
         </p:txBody>
       </p:sp>
@@ -12617,7 +12905,7 @@
           <a:lstStyle/>
           <a:p>
             <a:pPr>
-              <a:defRPr b="1" sz="1600">
+              <a:defRPr sz="1600" b="1">
                 <a:solidFill>
                   <a:srgbClr val="122747"/>
                 </a:solidFill>
@@ -12639,7 +12927,7 @@
         <p:spPr>
           <a:xfrm>
             <a:off x="8302752" y="5495544"/>
-            <a:ext cx="2916936" cy="393192"/>
+            <a:ext cx="2916936" cy="400494"/>
           </a:xfrm>
           <a:prstGeom prst="rect">
             <a:avLst/>
@@ -12667,7 +12955,8 @@
               </a:defRPr>
             </a:pPr>
             <a:r>
-              <a:t>codex/3dmnist-attnv2-training</a:t>
+              <a:rPr dirty="0"/>
+              <a:t>3dmnist-attnv2-training</a:t>
             </a:r>
           </a:p>
         </p:txBody>
@@ -12712,6 +13001,7 @@
           <a:lstStyle/>
           <a:p>
             <a:pPr algn="ctr"/>
+            <a:endParaRPr/>
           </a:p>
         </p:txBody>
       </p:sp>
@@ -12796,7 +13086,7 @@
 </file>
 
 <file path=ppt/slides/slide4.xml><?xml version="1.0" encoding="utf-8"?>
-<p:sld xmlns:a="http://schemas.openxmlformats.org/drawingml/2006/main" xmlns:p="http://schemas.openxmlformats.org/presentationml/2006/main" xmlns:r="http://schemas.openxmlformats.org/officeDocument/2006/relationships">
+<p:sld xmlns:a="http://schemas.openxmlformats.org/drawingml/2006/main" xmlns:r="http://schemas.openxmlformats.org/officeDocument/2006/relationships" xmlns:p="http://schemas.openxmlformats.org/presentationml/2006/main">
   <p:cSld>
     <p:bg>
       <p:bgPr>
@@ -12812,7 +13102,14 @@
         <p:cNvGrpSpPr/>
         <p:nvPr/>
       </p:nvGrpSpPr>
-      <p:grpSpPr/>
+      <p:grpSpPr>
+        <a:xfrm>
+          <a:off x="0" y="0"/>
+          <a:ext cx="0" cy="0"/>
+          <a:chOff x="0" y="0"/>
+          <a:chExt cx="0" cy="0"/>
+        </a:xfrm>
+      </p:grpSpPr>
       <p:sp>
         <p:nvSpPr>
           <p:cNvPr id="2" name="Rectangle 1"/>
@@ -12853,6 +13150,7 @@
           <a:lstStyle/>
           <a:p>
             <a:pPr algn="ctr"/>
+            <a:endParaRPr/>
           </a:p>
         </p:txBody>
       </p:sp>
@@ -12898,7 +13196,7 @@
           <a:lstStyle/>
           <a:p>
             <a:pPr algn="ctr">
-              <a:defRPr b="1" sz="1400">
+              <a:defRPr sz="1400" b="1">
                 <a:solidFill>
                   <a:srgbClr val="0078D4"/>
                 </a:solidFill>
@@ -12934,7 +13232,7 @@
           <a:lstStyle/>
           <a:p>
             <a:pPr>
-              <a:defRPr b="1" sz="3000">
+              <a:defRPr sz="3000" b="1">
                 <a:solidFill>
                   <a:srgbClr val="122747"/>
                 </a:solidFill>
@@ -13025,6 +13323,7 @@
           <a:lstStyle/>
           <a:p>
             <a:pPr algn="ctr"/>
+            <a:endParaRPr/>
           </a:p>
         </p:txBody>
       </p:sp>
@@ -13068,6 +13367,7 @@
           <a:lstStyle/>
           <a:p>
             <a:pPr algn="ctr"/>
+            <a:endParaRPr/>
           </a:p>
         </p:txBody>
       </p:sp>
@@ -13094,7 +13394,7 @@
           <a:lstStyle/>
           <a:p>
             <a:pPr>
-              <a:defRPr b="1" sz="1800">
+              <a:defRPr sz="1800" b="1">
                 <a:solidFill>
                   <a:srgbClr val="122747"/>
                 </a:solidFill>
@@ -13248,6 +13548,7 @@
           <a:lstStyle/>
           <a:p>
             <a:pPr algn="ctr"/>
+            <a:endParaRPr/>
           </a:p>
         </p:txBody>
       </p:sp>
@@ -13291,6 +13592,7 @@
           <a:lstStyle/>
           <a:p>
             <a:pPr algn="ctr"/>
+            <a:endParaRPr/>
           </a:p>
         </p:txBody>
       </p:sp>
@@ -13317,7 +13619,7 @@
           <a:lstStyle/>
           <a:p>
             <a:pPr>
-              <a:defRPr b="1" sz="1800">
+              <a:defRPr sz="1800" b="1">
                 <a:solidFill>
                   <a:srgbClr val="122747"/>
                 </a:solidFill>
@@ -13471,6 +13773,7 @@
           <a:lstStyle/>
           <a:p>
             <a:pPr algn="ctr"/>
+            <a:endParaRPr/>
           </a:p>
         </p:txBody>
       </p:sp>
@@ -13514,6 +13817,7 @@
           <a:lstStyle/>
           <a:p>
             <a:pPr algn="ctr"/>
+            <a:endParaRPr/>
           </a:p>
         </p:txBody>
       </p:sp>
@@ -13540,7 +13844,7 @@
           <a:lstStyle/>
           <a:p>
             <a:pPr>
-              <a:defRPr b="1" sz="1800">
+              <a:defRPr sz="1800" b="1">
                 <a:solidFill>
                   <a:srgbClr val="122747"/>
                 </a:solidFill>
@@ -13675,6 +13979,7 @@
           <a:lstStyle/>
           <a:p>
             <a:pPr algn="ctr"/>
+            <a:endParaRPr/>
           </a:p>
         </p:txBody>
       </p:sp>
@@ -13718,6 +14023,7 @@
           <a:lstStyle/>
           <a:p>
             <a:pPr algn="ctr"/>
+            <a:endParaRPr/>
           </a:p>
         </p:txBody>
       </p:sp>
@@ -13744,7 +14050,7 @@
           <a:lstStyle/>
           <a:p>
             <a:pPr>
-              <a:defRPr b="1" sz="1800">
+              <a:defRPr sz="1800" b="1">
                 <a:solidFill>
                   <a:srgbClr val="122747"/>
                 </a:solidFill>
@@ -13900,6 +14206,7 @@
           <a:lstStyle/>
           <a:p>
             <a:pPr algn="ctr"/>
+            <a:endParaRPr/>
           </a:p>
         </p:txBody>
       </p:sp>
@@ -13984,7 +14291,7 @@
 </file>
 
 <file path=ppt/slides/slide5.xml><?xml version="1.0" encoding="utf-8"?>
-<p:sld xmlns:a="http://schemas.openxmlformats.org/drawingml/2006/main" xmlns:p="http://schemas.openxmlformats.org/presentationml/2006/main" xmlns:r="http://schemas.openxmlformats.org/officeDocument/2006/relationships">
+<p:sld xmlns:a="http://schemas.openxmlformats.org/drawingml/2006/main" xmlns:r="http://schemas.openxmlformats.org/officeDocument/2006/relationships" xmlns:p="http://schemas.openxmlformats.org/presentationml/2006/main">
   <p:cSld>
     <p:bg>
       <p:bgPr>
@@ -14000,7 +14307,14 @@
         <p:cNvGrpSpPr/>
         <p:nvPr/>
       </p:nvGrpSpPr>
-      <p:grpSpPr/>
+      <p:grpSpPr>
+        <a:xfrm>
+          <a:off x="0" y="0"/>
+          <a:ext cx="0" cy="0"/>
+          <a:chOff x="0" y="0"/>
+          <a:chExt cx="0" cy="0"/>
+        </a:xfrm>
+      </p:grpSpPr>
       <p:sp>
         <p:nvSpPr>
           <p:cNvPr id="2" name="Rectangle 1"/>
@@ -14041,6 +14355,7 @@
           <a:lstStyle/>
           <a:p>
             <a:pPr algn="ctr"/>
+            <a:endParaRPr/>
           </a:p>
         </p:txBody>
       </p:sp>
@@ -14086,7 +14401,7 @@
           <a:lstStyle/>
           <a:p>
             <a:pPr algn="ctr">
-              <a:defRPr b="1" sz="1400">
+              <a:defRPr sz="1400" b="1">
                 <a:solidFill>
                   <a:srgbClr val="0078D4"/>
                 </a:solidFill>
@@ -14122,7 +14437,7 @@
           <a:lstStyle/>
           <a:p>
             <a:pPr>
-              <a:defRPr b="1" sz="3000">
+              <a:defRPr sz="3000" b="1">
                 <a:solidFill>
                   <a:srgbClr val="122747"/>
                 </a:solidFill>
@@ -14213,6 +14528,7 @@
           <a:lstStyle/>
           <a:p>
             <a:pPr algn="ctr"/>
+            <a:endParaRPr/>
           </a:p>
         </p:txBody>
       </p:sp>
@@ -14256,6 +14572,7 @@
           <a:lstStyle/>
           <a:p>
             <a:pPr algn="ctr"/>
+            <a:endParaRPr/>
           </a:p>
         </p:txBody>
       </p:sp>
@@ -14282,7 +14599,7 @@
           <a:lstStyle/>
           <a:p>
             <a:pPr>
-              <a:defRPr b="1" sz="1800">
+              <a:defRPr sz="1800" b="1">
                 <a:solidFill>
                   <a:srgbClr val="122747"/>
                 </a:solidFill>
@@ -14417,6 +14734,7 @@
           <a:lstStyle/>
           <a:p>
             <a:pPr algn="ctr"/>
+            <a:endParaRPr/>
           </a:p>
         </p:txBody>
       </p:sp>
@@ -14460,6 +14778,7 @@
           <a:lstStyle/>
           <a:p>
             <a:pPr algn="ctr"/>
+            <a:endParaRPr/>
           </a:p>
         </p:txBody>
       </p:sp>
@@ -14486,7 +14805,7 @@
           <a:lstStyle/>
           <a:p>
             <a:pPr>
-              <a:defRPr b="1" sz="1800">
+              <a:defRPr sz="1800" b="1">
                 <a:solidFill>
                   <a:srgbClr val="122747"/>
                 </a:solidFill>
@@ -14621,6 +14940,7 @@
           <a:lstStyle/>
           <a:p>
             <a:pPr algn="ctr"/>
+            <a:endParaRPr/>
           </a:p>
         </p:txBody>
       </p:sp>
@@ -14664,6 +14984,7 @@
           <a:lstStyle/>
           <a:p>
             <a:pPr algn="ctr"/>
+            <a:endParaRPr/>
           </a:p>
         </p:txBody>
       </p:sp>
@@ -14690,7 +15011,7 @@
           <a:lstStyle/>
           <a:p>
             <a:pPr>
-              <a:defRPr b="1" sz="1800">
+              <a:defRPr sz="1800" b="1">
                 <a:solidFill>
                   <a:srgbClr val="122747"/>
                 </a:solidFill>
@@ -14825,6 +15146,7 @@
           <a:lstStyle/>
           <a:p>
             <a:pPr algn="ctr"/>
+            <a:endParaRPr/>
           </a:p>
         </p:txBody>
       </p:sp>
@@ -14868,6 +15190,7 @@
           <a:lstStyle/>
           <a:p>
             <a:pPr algn="ctr"/>
+            <a:endParaRPr/>
           </a:p>
         </p:txBody>
       </p:sp>
@@ -14894,7 +15217,7 @@
           <a:lstStyle/>
           <a:p>
             <a:pPr>
-              <a:defRPr b="1" sz="1800">
+              <a:defRPr sz="1800" b="1">
                 <a:solidFill>
                   <a:srgbClr val="122747"/>
                 </a:solidFill>
@@ -15046,6 +15369,7 @@
           <a:lstStyle/>
           <a:p>
             <a:pPr algn="ctr"/>
+            <a:endParaRPr/>
           </a:p>
         </p:txBody>
       </p:sp>
@@ -15130,7 +15454,7 @@
 </file>
 
 <file path=ppt/slides/slide6.xml><?xml version="1.0" encoding="utf-8"?>
-<p:sld xmlns:a="http://schemas.openxmlformats.org/drawingml/2006/main" xmlns:p="http://schemas.openxmlformats.org/presentationml/2006/main" xmlns:r="http://schemas.openxmlformats.org/officeDocument/2006/relationships">
+<p:sld xmlns:a="http://schemas.openxmlformats.org/drawingml/2006/main" xmlns:r="http://schemas.openxmlformats.org/officeDocument/2006/relationships" xmlns:p="http://schemas.openxmlformats.org/presentationml/2006/main">
   <p:cSld>
     <p:bg>
       <p:bgPr>
@@ -15146,7 +15470,14 @@
         <p:cNvGrpSpPr/>
         <p:nvPr/>
       </p:nvGrpSpPr>
-      <p:grpSpPr/>
+      <p:grpSpPr>
+        <a:xfrm>
+          <a:off x="0" y="0"/>
+          <a:ext cx="0" cy="0"/>
+          <a:chOff x="0" y="0"/>
+          <a:chExt cx="0" cy="0"/>
+        </a:xfrm>
+      </p:grpSpPr>
       <p:sp>
         <p:nvSpPr>
           <p:cNvPr id="2" name="Rectangle 1"/>
@@ -15187,6 +15518,7 @@
           <a:lstStyle/>
           <a:p>
             <a:pPr algn="ctr"/>
+            <a:endParaRPr/>
           </a:p>
         </p:txBody>
       </p:sp>
@@ -15232,7 +15564,7 @@
           <a:lstStyle/>
           <a:p>
             <a:pPr algn="ctr">
-              <a:defRPr b="1" sz="1400">
+              <a:defRPr sz="1400" b="1">
                 <a:solidFill>
                   <a:srgbClr val="0078D4"/>
                 </a:solidFill>
@@ -15268,7 +15600,7 @@
           <a:lstStyle/>
           <a:p>
             <a:pPr>
-              <a:defRPr b="1" sz="3000">
+              <a:defRPr sz="3000" b="1">
                 <a:solidFill>
                   <a:srgbClr val="122747"/>
                 </a:solidFill>
@@ -15420,6 +15752,7 @@
           <a:lstStyle/>
           <a:p>
             <a:pPr algn="ctr"/>
+            <a:endParaRPr/>
           </a:p>
         </p:txBody>
       </p:sp>
@@ -15446,7 +15779,7 @@
           <a:lstStyle/>
           <a:p>
             <a:pPr>
-              <a:defRPr b="1" sz="2800">
+              <a:defRPr sz="2800" b="1">
                 <a:solidFill>
                   <a:srgbClr val="0078D4"/>
                 </a:solidFill>
@@ -15537,6 +15870,7 @@
           <a:lstStyle/>
           <a:p>
             <a:pPr algn="ctr"/>
+            <a:endParaRPr/>
           </a:p>
         </p:txBody>
       </p:sp>
@@ -15563,7 +15897,7 @@
           <a:lstStyle/>
           <a:p>
             <a:pPr>
-              <a:defRPr b="1" sz="2800">
+              <a:defRPr sz="2800" b="1">
                 <a:solidFill>
                   <a:srgbClr val="198754"/>
                 </a:solidFill>
@@ -15694,6 +16028,7 @@
           <a:lstStyle/>
           <a:p>
             <a:pPr algn="ctr"/>
+            <a:endParaRPr/>
           </a:p>
         </p:txBody>
       </p:sp>
@@ -15778,7 +16113,7 @@
 </file>
 
 <file path=ppt/slides/slide7.xml><?xml version="1.0" encoding="utf-8"?>
-<p:sld xmlns:a="http://schemas.openxmlformats.org/drawingml/2006/main" xmlns:p="http://schemas.openxmlformats.org/presentationml/2006/main" xmlns:r="http://schemas.openxmlformats.org/officeDocument/2006/relationships">
+<p:sld xmlns:a="http://schemas.openxmlformats.org/drawingml/2006/main" xmlns:r="http://schemas.openxmlformats.org/officeDocument/2006/relationships" xmlns:p="http://schemas.openxmlformats.org/presentationml/2006/main">
   <p:cSld>
     <p:bg>
       <p:bgPr>
@@ -15794,7 +16129,14 @@
         <p:cNvGrpSpPr/>
         <p:nvPr/>
       </p:nvGrpSpPr>
-      <p:grpSpPr/>
+      <p:grpSpPr>
+        <a:xfrm>
+          <a:off x="0" y="0"/>
+          <a:ext cx="0" cy="0"/>
+          <a:chOff x="0" y="0"/>
+          <a:chExt cx="0" cy="0"/>
+        </a:xfrm>
+      </p:grpSpPr>
       <p:sp>
         <p:nvSpPr>
           <p:cNvPr id="2" name="Rectangle 1"/>
@@ -15835,6 +16177,7 @@
           <a:lstStyle/>
           <a:p>
             <a:pPr algn="ctr"/>
+            <a:endParaRPr/>
           </a:p>
         </p:txBody>
       </p:sp>
@@ -15880,7 +16223,7 @@
           <a:lstStyle/>
           <a:p>
             <a:pPr algn="ctr">
-              <a:defRPr b="1" sz="1400">
+              <a:defRPr sz="1400" b="1">
                 <a:solidFill>
                   <a:srgbClr val="0078D4"/>
                 </a:solidFill>
@@ -15916,7 +16259,7 @@
           <a:lstStyle/>
           <a:p>
             <a:pPr>
-              <a:defRPr b="1" sz="3000">
+              <a:defRPr sz="3000" b="1">
                 <a:solidFill>
                   <a:srgbClr val="122747"/>
                 </a:solidFill>
@@ -16007,6 +16350,7 @@
           <a:lstStyle/>
           <a:p>
             <a:pPr algn="ctr"/>
+            <a:endParaRPr/>
           </a:p>
         </p:txBody>
       </p:sp>
@@ -16050,6 +16394,7 @@
           <a:lstStyle/>
           <a:p>
             <a:pPr algn="ctr"/>
+            <a:endParaRPr/>
           </a:p>
         </p:txBody>
       </p:sp>
@@ -16061,7 +16406,7 @@
         </p:nvSpPr>
         <p:spPr>
           <a:xfrm>
-            <a:off x="896112" y="1975104"/>
+            <a:off x="566928" y="1970532"/>
             <a:ext cx="3099816" cy="411480"/>
           </a:xfrm>
           <a:prstGeom prst="rect">
@@ -16076,7 +16421,7 @@
           <a:lstStyle/>
           <a:p>
             <a:pPr>
-              <a:defRPr b="1" sz="1800">
+              <a:defRPr sz="1800" b="1">
                 <a:solidFill>
                   <a:srgbClr val="122747"/>
                 </a:solidFill>
@@ -16084,6 +16429,7 @@
               </a:defRPr>
             </a:pPr>
             <a:r>
+              <a:rPr dirty="0"/>
               <a:t>Problem 1: invalid local attention</a:t>
             </a:r>
           </a:p>
@@ -16211,6 +16557,7 @@
           <a:lstStyle/>
           <a:p>
             <a:pPr algn="ctr"/>
+            <a:endParaRPr/>
           </a:p>
         </p:txBody>
       </p:sp>
@@ -16254,42 +16601,7 @@
           <a:lstStyle/>
           <a:p>
             <a:pPr algn="ctr"/>
-          </a:p>
-        </p:txBody>
-      </p:sp>
-      <p:sp>
-        <p:nvSpPr>
-          <p:cNvPr id="12" name="TextBox 11"/>
-          <p:cNvSpPr txBox="1"/>
-          <p:nvPr/>
-        </p:nvSpPr>
-        <p:spPr>
-          <a:xfrm>
-            <a:off x="4553712" y="1975104"/>
-            <a:ext cx="3099816" cy="411480"/>
-          </a:xfrm>
-          <a:prstGeom prst="rect">
-            <a:avLst/>
-          </a:prstGeom>
-          <a:noFill/>
-        </p:spPr>
-        <p:txBody>
-          <a:bodyPr wrap="none">
-            <a:spAutoFit/>
-          </a:bodyPr>
-          <a:lstStyle/>
-          <a:p>
-            <a:pPr>
-              <a:defRPr b="1" sz="1800">
-                <a:solidFill>
-                  <a:srgbClr val="122747"/>
-                </a:solidFill>
-                <a:latin typeface="Avenir Next"/>
-              </a:defRPr>
-            </a:pPr>
-            <a:r>
-              <a:t>Problem 2: over-compressed fusion</a:t>
-            </a:r>
+            <a:endParaRPr/>
           </a:p>
         </p:txBody>
       </p:sp>
@@ -16415,6 +16727,7 @@
           <a:lstStyle/>
           <a:p>
             <a:pPr algn="ctr"/>
+            <a:endParaRPr/>
           </a:p>
         </p:txBody>
       </p:sp>
@@ -16458,6 +16771,7 @@
           <a:lstStyle/>
           <a:p>
             <a:pPr algn="ctr"/>
+            <a:endParaRPr/>
           </a:p>
         </p:txBody>
       </p:sp>
@@ -16469,7 +16783,7 @@
         </p:nvSpPr>
         <p:spPr>
           <a:xfrm>
-            <a:off x="8211312" y="1975104"/>
+            <a:off x="8293608" y="1954609"/>
             <a:ext cx="3099816" cy="411480"/>
           </a:xfrm>
           <a:prstGeom prst="rect">
@@ -16484,7 +16798,7 @@
           <a:lstStyle/>
           <a:p>
             <a:pPr>
-              <a:defRPr b="1" sz="1800">
+              <a:defRPr sz="1800" b="1">
                 <a:solidFill>
                   <a:srgbClr val="122747"/>
                 </a:solidFill>
@@ -16492,6 +16806,7 @@
               </a:defRPr>
             </a:pPr>
             <a:r>
+              <a:rPr dirty="0"/>
               <a:t>Problem 3: weak classifier</a:t>
             </a:r>
           </a:p>
@@ -16600,6 +16915,7 @@
           <a:lstStyle/>
           <a:p>
             <a:pPr algn="ctr"/>
+            <a:endParaRPr/>
           </a:p>
         </p:txBody>
       </p:sp>
@@ -16626,7 +16942,7 @@
           <a:lstStyle/>
           <a:p>
             <a:pPr>
-              <a:defRPr b="1" sz="2800">
+              <a:defRPr sz="2800" b="1">
                 <a:solidFill>
                   <a:srgbClr val="C0392B"/>
                 </a:solidFill>
@@ -16715,6 +17031,7 @@
           <a:lstStyle/>
           <a:p>
             <a:pPr algn="ctr"/>
+            <a:endParaRPr/>
           </a:p>
         </p:txBody>
       </p:sp>
@@ -16786,6 +17103,43 @@
             </a:pPr>
             <a:r>
               <a:t>7/16</a:t>
+            </a:r>
+          </a:p>
+        </p:txBody>
+      </p:sp>
+      <p:sp>
+        <p:nvSpPr>
+          <p:cNvPr id="12" name="TextBox 11"/>
+          <p:cNvSpPr txBox="1"/>
+          <p:nvPr/>
+        </p:nvSpPr>
+        <p:spPr>
+          <a:xfrm>
+            <a:off x="4325112" y="1954609"/>
+            <a:ext cx="3099816" cy="411480"/>
+          </a:xfrm>
+          <a:prstGeom prst="rect">
+            <a:avLst/>
+          </a:prstGeom>
+          <a:noFill/>
+        </p:spPr>
+        <p:txBody>
+          <a:bodyPr wrap="none">
+            <a:spAutoFit/>
+          </a:bodyPr>
+          <a:lstStyle/>
+          <a:p>
+            <a:pPr>
+              <a:defRPr sz="1800" b="1">
+                <a:solidFill>
+                  <a:srgbClr val="122747"/>
+                </a:solidFill>
+                <a:latin typeface="Avenir Next"/>
+              </a:defRPr>
+            </a:pPr>
+            <a:r>
+              <a:rPr dirty="0"/>
+              <a:t>Problem 2: over-compressed fusion</a:t>
             </a:r>
           </a:p>
         </p:txBody>
@@ -16799,7 +17153,7 @@
 </file>
 
 <file path=ppt/slides/slide8.xml><?xml version="1.0" encoding="utf-8"?>
-<p:sld xmlns:a="http://schemas.openxmlformats.org/drawingml/2006/main" xmlns:p="http://schemas.openxmlformats.org/presentationml/2006/main" xmlns:r="http://schemas.openxmlformats.org/officeDocument/2006/relationships">
+<p:sld xmlns:a="http://schemas.openxmlformats.org/drawingml/2006/main" xmlns:r="http://schemas.openxmlformats.org/officeDocument/2006/relationships" xmlns:p="http://schemas.openxmlformats.org/presentationml/2006/main">
   <p:cSld>
     <p:bg>
       <p:bgPr>
@@ -16815,7 +17169,14 @@
         <p:cNvGrpSpPr/>
         <p:nvPr/>
       </p:nvGrpSpPr>
-      <p:grpSpPr/>
+      <p:grpSpPr>
+        <a:xfrm>
+          <a:off x="0" y="0"/>
+          <a:ext cx="0" cy="0"/>
+          <a:chOff x="0" y="0"/>
+          <a:chExt cx="0" cy="0"/>
+        </a:xfrm>
+      </p:grpSpPr>
       <p:sp>
         <p:nvSpPr>
           <p:cNvPr id="2" name="Rectangle 1"/>
@@ -16856,6 +17217,7 @@
           <a:lstStyle/>
           <a:p>
             <a:pPr algn="ctr"/>
+            <a:endParaRPr/>
           </a:p>
         </p:txBody>
       </p:sp>
@@ -16901,7 +17263,7 @@
           <a:lstStyle/>
           <a:p>
             <a:pPr algn="ctr">
-              <a:defRPr b="1" sz="1400">
+              <a:defRPr sz="1400" b="1">
                 <a:solidFill>
                   <a:srgbClr val="0078D4"/>
                 </a:solidFill>
@@ -16937,7 +17299,7 @@
           <a:lstStyle/>
           <a:p>
             <a:pPr>
-              <a:defRPr b="1" sz="3000">
+              <a:defRPr sz="3000" b="1">
                 <a:solidFill>
                   <a:srgbClr val="122747"/>
                 </a:solidFill>
@@ -17028,6 +17390,7 @@
           <a:lstStyle/>
           <a:p>
             <a:pPr algn="ctr"/>
+            <a:endParaRPr/>
           </a:p>
         </p:txBody>
       </p:sp>
@@ -17071,6 +17434,7 @@
           <a:lstStyle/>
           <a:p>
             <a:pPr algn="ctr"/>
+            <a:endParaRPr/>
           </a:p>
         </p:txBody>
       </p:sp>
@@ -17097,7 +17461,7 @@
           <a:lstStyle/>
           <a:p>
             <a:pPr>
-              <a:defRPr b="1" sz="1800">
+              <a:defRPr sz="1800" b="1">
                 <a:solidFill>
                   <a:srgbClr val="122747"/>
                 </a:solidFill>
@@ -17213,6 +17577,7 @@
           <a:lstStyle/>
           <a:p>
             <a:pPr algn="ctr"/>
+            <a:endParaRPr/>
           </a:p>
         </p:txBody>
       </p:sp>
@@ -17256,6 +17621,7 @@
           <a:lstStyle/>
           <a:p>
             <a:pPr algn="ctr"/>
+            <a:endParaRPr/>
           </a:p>
         </p:txBody>
       </p:sp>
@@ -17282,7 +17648,7 @@
           <a:lstStyle/>
           <a:p>
             <a:pPr>
-              <a:defRPr b="1" sz="1800">
+              <a:defRPr sz="1800" b="1">
                 <a:solidFill>
                   <a:srgbClr val="122747"/>
                 </a:solidFill>
@@ -17398,6 +17764,7 @@
           <a:lstStyle/>
           <a:p>
             <a:pPr algn="ctr"/>
+            <a:endParaRPr/>
           </a:p>
         </p:txBody>
       </p:sp>
@@ -17441,6 +17808,7 @@
           <a:lstStyle/>
           <a:p>
             <a:pPr algn="ctr"/>
+            <a:endParaRPr/>
           </a:p>
         </p:txBody>
       </p:sp>
@@ -17467,7 +17835,7 @@
           <a:lstStyle/>
           <a:p>
             <a:pPr>
-              <a:defRPr b="1" sz="1800">
+              <a:defRPr sz="1800" b="1">
                 <a:solidFill>
                   <a:srgbClr val="122747"/>
                 </a:solidFill>
@@ -17583,6 +17951,7 @@
           <a:lstStyle/>
           <a:p>
             <a:pPr algn="ctr"/>
+            <a:endParaRPr/>
           </a:p>
         </p:txBody>
       </p:sp>
@@ -17626,6 +17995,7 @@
           <a:lstStyle/>
           <a:p>
             <a:pPr algn="ctr"/>
+            <a:endParaRPr/>
           </a:p>
         </p:txBody>
       </p:sp>
@@ -17652,7 +18022,7 @@
           <a:lstStyle/>
           <a:p>
             <a:pPr>
-              <a:defRPr b="1" sz="1800">
+              <a:defRPr sz="1800" b="1">
                 <a:solidFill>
                   <a:srgbClr val="122747"/>
                 </a:solidFill>
@@ -17808,6 +18178,7 @@
           <a:lstStyle/>
           <a:p>
             <a:pPr algn="ctr"/>
+            <a:endParaRPr/>
           </a:p>
         </p:txBody>
       </p:sp>
@@ -17892,7 +18263,7 @@
 </file>
 
 <file path=ppt/slides/slide9.xml><?xml version="1.0" encoding="utf-8"?>
-<p:sld xmlns:a="http://schemas.openxmlformats.org/drawingml/2006/main" xmlns:p="http://schemas.openxmlformats.org/presentationml/2006/main" xmlns:r="http://schemas.openxmlformats.org/officeDocument/2006/relationships">
+<p:sld xmlns:a="http://schemas.openxmlformats.org/drawingml/2006/main" xmlns:r="http://schemas.openxmlformats.org/officeDocument/2006/relationships" xmlns:p="http://schemas.openxmlformats.org/presentationml/2006/main">
   <p:cSld>
     <p:bg>
       <p:bgPr>
@@ -17908,7 +18279,14 @@
         <p:cNvGrpSpPr/>
         <p:nvPr/>
       </p:nvGrpSpPr>
-      <p:grpSpPr/>
+      <p:grpSpPr>
+        <a:xfrm>
+          <a:off x="0" y="0"/>
+          <a:ext cx="0" cy="0"/>
+          <a:chOff x="0" y="0"/>
+          <a:chExt cx="0" cy="0"/>
+        </a:xfrm>
+      </p:grpSpPr>
       <p:sp>
         <p:nvSpPr>
           <p:cNvPr id="2" name="Rectangle 1"/>
@@ -17949,6 +18327,7 @@
           <a:lstStyle/>
           <a:p>
             <a:pPr algn="ctr"/>
+            <a:endParaRPr/>
           </a:p>
         </p:txBody>
       </p:sp>
@@ -17994,7 +18373,7 @@
           <a:lstStyle/>
           <a:p>
             <a:pPr algn="ctr">
-              <a:defRPr b="1" sz="1400">
+              <a:defRPr sz="1400" b="1">
                 <a:solidFill>
                   <a:srgbClr val="0078D4"/>
                 </a:solidFill>
@@ -18030,7 +18409,7 @@
           <a:lstStyle/>
           <a:p>
             <a:pPr>
-              <a:defRPr b="1" sz="3000">
+              <a:defRPr sz="3000" b="1">
                 <a:solidFill>
                   <a:srgbClr val="122747"/>
                 </a:solidFill>
@@ -18121,6 +18500,7 @@
           <a:lstStyle/>
           <a:p>
             <a:pPr algn="ctr"/>
+            <a:endParaRPr/>
           </a:p>
         </p:txBody>
       </p:sp>
@@ -18164,6 +18544,7 @@
           <a:lstStyle/>
           <a:p>
             <a:pPr algn="ctr"/>
+            <a:endParaRPr/>
           </a:p>
         </p:txBody>
       </p:sp>
@@ -18190,7 +18571,7 @@
           <a:lstStyle/>
           <a:p>
             <a:pPr>
-              <a:defRPr b="1" sz="1800">
+              <a:defRPr sz="1800" b="1">
                 <a:solidFill>
                   <a:srgbClr val="122747"/>
                 </a:solidFill>
@@ -18325,6 +18706,7 @@
           <a:lstStyle/>
           <a:p>
             <a:pPr algn="ctr"/>
+            <a:endParaRPr/>
           </a:p>
         </p:txBody>
       </p:sp>
@@ -18368,6 +18750,7 @@
           <a:lstStyle/>
           <a:p>
             <a:pPr algn="ctr"/>
+            <a:endParaRPr/>
           </a:p>
         </p:txBody>
       </p:sp>
@@ -18394,7 +18777,7 @@
           <a:lstStyle/>
           <a:p>
             <a:pPr>
-              <a:defRPr b="1" sz="1800">
+              <a:defRPr sz="1800" b="1">
                 <a:solidFill>
                   <a:srgbClr val="122747"/>
                 </a:solidFill>
@@ -18510,6 +18893,7 @@
           <a:lstStyle/>
           <a:p>
             <a:pPr algn="ctr"/>
+            <a:endParaRPr/>
           </a:p>
         </p:txBody>
       </p:sp>
@@ -18553,6 +18937,7 @@
           <a:lstStyle/>
           <a:p>
             <a:pPr algn="ctr"/>
+            <a:endParaRPr/>
           </a:p>
         </p:txBody>
       </p:sp>
@@ -18579,7 +18964,7 @@
           <a:lstStyle/>
           <a:p>
             <a:pPr>
-              <a:defRPr b="1" sz="1800">
+              <a:defRPr sz="1800" b="1">
                 <a:solidFill>
                   <a:srgbClr val="122747"/>
                 </a:solidFill>
@@ -18731,6 +19116,7 @@
           <a:lstStyle/>
           <a:p>
             <a:pPr algn="ctr"/>
+            <a:endParaRPr/>
           </a:p>
         </p:txBody>
       </p:sp>
